--- a/assets/powerpoints/module-sante/C2-les-verbes-pronominaux.pptx
+++ b/assets/powerpoints/module-sante/C2-les-verbes-pronominaux.pptx
@@ -20,6 +20,7 @@
     <p:sldId id="268" r:id="rId20"/>
     <p:sldId id="269" r:id="rId21"/>
     <p:sldId id="270" r:id="rId22"/>
+    <p:sldId id="271" r:id="rId23"/>
   </p:sldIdLst>
   <p:sldSz cx="12191695" cy="6858000" type="screen4x3"/>
   <p:notesSz cx="6858000" cy="9144000"/>
@@ -586,7 +587,7 @@
           <a:lstStyle/>
           <a:p>
             <a:r>
-              <a:t>La troisième ligne est un piège volontaire : le verbe attendu n'existe pas dans la phrase. Laisser chercher avant de le dire.</a:t>
+              <a:t>Erreur systématique quand la langue d'origine a un pronom invariable. Ne pas s'en étonner, la corriger sans commenter.</a:t>
             </a:r>
           </a:p>
         </p:txBody>
@@ -656,7 +657,7 @@
           <a:lstStyle/>
           <a:p>
             <a:r>
-              <a:t>Corriger en groupe. Donner la bonne réponse, sans revenir sur qui s'est trompé.</a:t>
+              <a:t>La troisième ligne est un piège volontaire : le verbe attendu n'existe pas dans la phrase. Laisser chercher avant de le dire.</a:t>
             </a:r>
           </a:p>
         </p:txBody>
@@ -726,7 +727,7 @@
           <a:lstStyle/>
           <a:p>
             <a:r>
-              <a:t>Les quatre questions sont celles d'une vraie consultation. Les faire poser par un élève, pas par l'enseignant.</a:t>
+              <a:t>Corriger en groupe. Donner la bonne réponse, sans revenir sur qui s'est trompé.</a:t>
             </a:r>
           </a:p>
         </p:txBody>
@@ -796,7 +797,7 @@
           <a:lstStyle/>
           <a:p>
             <a:r>
-              <a:t>Corriger en groupe. Donner la bonne réponse, sans revenir sur qui s'est trompé.</a:t>
+              <a:t>Les quatre questions sont celles d'une vraie consultation. Les faire poser par un élève, pas par l'enseignant.</a:t>
             </a:r>
           </a:p>
         </p:txBody>
@@ -866,7 +867,7 @@
           <a:lstStyle/>
           <a:p>
             <a:r>
-              <a:t>Dix minutes. Ramasser : les pronoms oubliés se comptent vite et disent où en est le groupe.</a:t>
+              <a:t>Corriger en groupe. Donner la bonne réponse, sans revenir sur qui s'est trompé.</a:t>
             </a:r>
           </a:p>
         </p:txBody>
@@ -936,6 +937,76 @@
           <a:lstStyle/>
           <a:p>
             <a:r>
+              <a:t>Dix minutes. Ramasser : les pronoms oubliés se comptent vite et disent où en est le groupe.</a:t>
+            </a:r>
+          </a:p>
+        </p:txBody>
+      </p:sp>
+      <p:sp>
+        <p:nvSpPr>
+          <p:cNvPr id="4" name="Slide Number Placeholder 3"/>
+          <p:cNvSpPr>
+            <a:spLocks noGrp="1"/>
+          </p:cNvSpPr>
+          <p:nvPr>
+            <p:ph type="sldNum" idx="5" sz="quarter"/>
+          </p:nvPr>
+        </p:nvSpPr>
+        <p:spPr/>
+      </p:sp>
+    </p:spTree>
+  </p:cSld>
+  <p:clrMapOvr>
+    <a:masterClrMapping/>
+  </p:clrMapOvr>
+</p:notes>
+</file>
+
+<file path=ppt/notesSlides/notesSlide16.xml><?xml version="1.0" encoding="utf-8"?>
+<p:notes xmlns:a="http://schemas.openxmlformats.org/drawingml/2006/main" xmlns:p="http://schemas.openxmlformats.org/presentationml/2006/main" xmlns:r="http://schemas.openxmlformats.org/officeDocument/2006/relationships">
+  <p:cSld>
+    <p:spTree>
+      <p:nvGrpSpPr>
+        <p:cNvPr id="1" name=""/>
+        <p:cNvGrpSpPr/>
+        <p:nvPr/>
+      </p:nvGrpSpPr>
+      <p:grpSpPr>
+        <a:xfrm>
+          <a:off x="0" y="0"/>
+          <a:ext cx="0" cy="0"/>
+          <a:chOff x="0" y="0"/>
+          <a:chExt cx="0" cy="0"/>
+        </a:xfrm>
+      </p:grpSpPr>
+      <p:sp>
+        <p:nvSpPr>
+          <p:cNvPr id="2" name="Slide Image Placeholder 1"/>
+          <p:cNvSpPr>
+            <a:spLocks noGrp="1"/>
+          </p:cNvSpPr>
+          <p:nvPr>
+            <p:ph type="sldImg" idx="2"/>
+          </p:nvPr>
+        </p:nvSpPr>
+        <p:spPr/>
+      </p:sp>
+      <p:sp>
+        <p:nvSpPr>
+          <p:cNvPr id="3" name="Notes Placeholder 2"/>
+          <p:cNvSpPr>
+            <a:spLocks noGrp="1"/>
+          </p:cNvSpPr>
+          <p:nvPr>
+            <p:ph type="body" idx="3" sz="quarter"/>
+          </p:nvPr>
+        </p:nvSpPr>
+        <p:spPr/>
+        <p:txBody>
+          <a:bodyPr/>
+          <a:lstStyle/>
+          <a:p>
+            <a:r>
               <a:t>Ramasser. C'est le contrôle le plus rapide de la séance : le pronom est juste ou il ne l'est pas.</a:t>
             </a:r>
           </a:p>
@@ -1426,7 +1497,7 @@
           <a:lstStyle/>
           <a:p>
             <a:r>
-              <a:t>Faire entendre les deux phrases l'une après l'autre. L'écart de sens fait rire, et c'est ce qui fait retenir.</a:t>
+              <a:t>Projeter avant d'ouvrir l'activité. Faire dire à deux ou trois élèves où irait la première réponse, sans y toucher : on vérifie qu'ils ont compris la consigne, pas le contenu. Ouvrir ensuite le module sur les postes.</a:t>
             </a:r>
           </a:p>
         </p:txBody>
@@ -1496,7 +1567,7 @@
           <a:lstStyle/>
           <a:p>
             <a:r>
-              <a:t>Erreur systématique quand la langue d'origine a un pronom invariable. Ne pas s'en étonner, la corriger sans commenter.</a:t>
+              <a:t>Faire entendre les deux phrases l'une après l'autre. L'écart de sens fait rire, et c'est ce qui fait retenir.</a:t>
             </a:r>
           </a:p>
         </p:txBody>
@@ -4918,7 +4989,7 @@
                 </a:solidFill>
                 <a:latin typeface="Verdana"/>
               </a:rPr>
-              <a:t>PRATIQUE · 2 DE 4</a:t>
+              <a:t>LE PIÈGE DU PRONOM QUI NE SUIT PAS</a:t>
             </a:r>
           </a:p>
         </p:txBody>
@@ -4957,64 +5028,273 @@
                 </a:solidFill>
                 <a:latin typeface="Verdana"/>
               </a:rPr>
-              <a:t>Avec ou sans pronom ?</a:t>
-            </a:r>
-          </a:p>
-        </p:txBody>
-      </p:sp>
-      <p:sp>
-        <p:nvSpPr>
-          <p:cNvPr id="7" name="TextBox 6"/>
-          <p:cNvSpPr txBox="1"/>
-          <p:nvPr/>
-        </p:nvSpPr>
-        <p:spPr>
-          <a:xfrm>
-            <a:off x="566928" y="1645920"/>
-            <a:ext cx="11057839" cy="329184"/>
-          </a:xfrm>
-          <a:prstGeom prst="rect">
-            <a:avLst/>
-          </a:prstGeom>
-          <a:noFill/>
-        </p:spPr>
-        <p:txBody>
-          <a:bodyPr wrap="square" lIns="0" rIns="0" tIns="0" bIns="0" anchor="t">
-            <a:spAutoFit/>
-          </a:bodyPr>
-          <a:lstStyle/>
-          <a:p>
-            <a:pPr algn="l">
-              <a:lnSpc>
-                <a:spcPct val="135000"/>
-              </a:lnSpc>
-            </a:pPr>
-            <a:r>
-              <a:rPr sz="1800" b="0" i="0">
-                <a:solidFill>
-                  <a:srgbClr val="6E7175"/>
-                </a:solidFill>
-                <a:latin typeface="Verdana"/>
-              </a:rPr>
-              <a:t>Les deux existent. Laquelle convient ici ?</a:t>
-            </a:r>
-          </a:p>
-        </p:txBody>
-      </p:sp>
-      <p:sp>
-        <p:nvSpPr>
-          <p:cNvPr id="8" name="Rounded Rectangle 7"/>
+              <a:t>Le piège le plus fréquent</a:t>
+            </a:r>
+          </a:p>
+        </p:txBody>
+      </p:sp>
+      <p:sp>
+        <p:nvSpPr>
+          <p:cNvPr id="7" name="Rounded Rectangle 6"/>
           <p:cNvSpPr/>
           <p:nvPr/>
         </p:nvSpPr>
         <p:spPr>
           <a:xfrm>
-            <a:off x="566928" y="2139696"/>
-            <a:ext cx="11057839" cy="648716"/>
+            <a:off x="566928" y="1856232"/>
+            <a:ext cx="5428335" cy="2331720"/>
           </a:xfrm>
           <a:prstGeom prst="roundRect">
             <a:avLst>
-              <a:gd name="adj" fmla="val 22552"/>
+              <a:gd name="adj" fmla="val 6274"/>
+            </a:avLst>
+          </a:prstGeom>
+          <a:solidFill>
+            <a:srgbClr val="FFF6F5"/>
+          </a:solidFill>
+          <a:ln w="12700">
+            <a:solidFill>
+              <a:srgbClr val="DC2626"/>
+            </a:solidFill>
+          </a:ln>
+          <a:effectLst/>
+        </p:spPr>
+        <p:style>
+          <a:lnRef idx="1">
+            <a:schemeClr val="accent1"/>
+          </a:lnRef>
+          <a:fillRef idx="3">
+            <a:schemeClr val="accent1"/>
+          </a:fillRef>
+          <a:effectRef idx="2">
+            <a:schemeClr val="accent1"/>
+          </a:effectRef>
+          <a:fontRef idx="minor">
+            <a:schemeClr val="lt1"/>
+          </a:fontRef>
+        </p:style>
+        <p:txBody>
+          <a:bodyPr rtlCol="0" anchor="ctr"/>
+          <a:lstStyle/>
+          <a:p/>
+        </p:txBody>
+      </p:sp>
+      <p:sp>
+        <p:nvSpPr>
+          <p:cNvPr id="8" name="TextBox 7"/>
+          <p:cNvSpPr txBox="1"/>
+          <p:nvPr/>
+        </p:nvSpPr>
+        <p:spPr>
+          <a:xfrm>
+            <a:off x="932688" y="2130552"/>
+            <a:ext cx="4696815" cy="274320"/>
+          </a:xfrm>
+          <a:prstGeom prst="rect">
+            <a:avLst/>
+          </a:prstGeom>
+          <a:noFill/>
+        </p:spPr>
+        <p:txBody>
+          <a:bodyPr wrap="square" lIns="0" rIns="0" tIns="0" bIns="0" anchor="t">
+            <a:spAutoFit/>
+          </a:bodyPr>
+          <a:lstStyle/>
+          <a:p>
+            <a:pPr algn="l">
+              <a:lnSpc>
+                <a:spcPct val="135000"/>
+              </a:lnSpc>
+            </a:pPr>
+            <a:r>
+              <a:rPr sz="1300" b="1" i="0" spc="156">
+                <a:solidFill>
+                  <a:srgbClr val="B91C1C"/>
+                </a:solidFill>
+                <a:latin typeface="Verdana"/>
+              </a:rPr>
+              <a:t>ON ENTEND SOUVENT</a:t>
+            </a:r>
+          </a:p>
+        </p:txBody>
+      </p:sp>
+      <p:sp>
+        <p:nvSpPr>
+          <p:cNvPr id="9" name="TextBox 8"/>
+          <p:cNvSpPr txBox="1"/>
+          <p:nvPr/>
+        </p:nvSpPr>
+        <p:spPr>
+          <a:xfrm>
+            <a:off x="932688" y="2569464"/>
+            <a:ext cx="4696815" cy="1417320"/>
+          </a:xfrm>
+          <a:prstGeom prst="rect">
+            <a:avLst/>
+          </a:prstGeom>
+          <a:noFill/>
+        </p:spPr>
+        <p:txBody>
+          <a:bodyPr wrap="square" lIns="0" rIns="0" tIns="0" bIns="0" anchor="t">
+            <a:spAutoFit/>
+          </a:bodyPr>
+          <a:lstStyle/>
+          <a:p>
+            <a:pPr algn="l">
+              <a:lnSpc>
+                <a:spcPct val="130000"/>
+              </a:lnSpc>
+            </a:pPr>
+            <a:r>
+              <a:rPr sz="2500" b="1" i="0">
+                <a:solidFill>
+                  <a:srgbClr val="17181A"/>
+                </a:solidFill>
+                <a:latin typeface="Verdana"/>
+              </a:rPr>
+              <a:t>Nous se reposons le week-end.</a:t>
+            </a:r>
+          </a:p>
+        </p:txBody>
+      </p:sp>
+      <p:sp>
+        <p:nvSpPr>
+          <p:cNvPr id="10" name="Rounded Rectangle 9"/>
+          <p:cNvSpPr/>
+          <p:nvPr/>
+        </p:nvSpPr>
+        <p:spPr>
+          <a:xfrm>
+            <a:off x="6196431" y="1856232"/>
+            <a:ext cx="5428335" cy="2331720"/>
+          </a:xfrm>
+          <a:prstGeom prst="roundRect">
+            <a:avLst>
+              <a:gd name="adj" fmla="val 6274"/>
+            </a:avLst>
+          </a:prstGeom>
+          <a:solidFill>
+            <a:srgbClr val="E6F5EE"/>
+          </a:solidFill>
+          <a:ln w="12700">
+            <a:solidFill>
+              <a:srgbClr val="0A8F5B"/>
+            </a:solidFill>
+          </a:ln>
+          <a:effectLst/>
+        </p:spPr>
+        <p:style>
+          <a:lnRef idx="1">
+            <a:schemeClr val="accent1"/>
+          </a:lnRef>
+          <a:fillRef idx="3">
+            <a:schemeClr val="accent1"/>
+          </a:fillRef>
+          <a:effectRef idx="2">
+            <a:schemeClr val="accent1"/>
+          </a:effectRef>
+          <a:fontRef idx="minor">
+            <a:schemeClr val="lt1"/>
+          </a:fontRef>
+        </p:style>
+        <p:txBody>
+          <a:bodyPr rtlCol="0" anchor="ctr"/>
+          <a:lstStyle/>
+          <a:p/>
+        </p:txBody>
+      </p:sp>
+      <p:sp>
+        <p:nvSpPr>
+          <p:cNvPr id="11" name="TextBox 10"/>
+          <p:cNvSpPr txBox="1"/>
+          <p:nvPr/>
+        </p:nvSpPr>
+        <p:spPr>
+          <a:xfrm>
+            <a:off x="6562191" y="2130552"/>
+            <a:ext cx="4696815" cy="274320"/>
+          </a:xfrm>
+          <a:prstGeom prst="rect">
+            <a:avLst/>
+          </a:prstGeom>
+          <a:noFill/>
+        </p:spPr>
+        <p:txBody>
+          <a:bodyPr wrap="square" lIns="0" rIns="0" tIns="0" bIns="0" anchor="t">
+            <a:spAutoFit/>
+          </a:bodyPr>
+          <a:lstStyle/>
+          <a:p>
+            <a:pPr algn="l">
+              <a:lnSpc>
+                <a:spcPct val="135000"/>
+              </a:lnSpc>
+            </a:pPr>
+            <a:r>
+              <a:rPr sz="1300" b="1" i="0" spc="156">
+                <a:solidFill>
+                  <a:srgbClr val="07734A"/>
+                </a:solidFill>
+                <a:latin typeface="Verdana"/>
+              </a:rPr>
+              <a:t>IL FAUT DIRE PLUTÔT</a:t>
+            </a:r>
+          </a:p>
+        </p:txBody>
+      </p:sp>
+      <p:sp>
+        <p:nvSpPr>
+          <p:cNvPr id="12" name="TextBox 11"/>
+          <p:cNvSpPr txBox="1"/>
+          <p:nvPr/>
+        </p:nvSpPr>
+        <p:spPr>
+          <a:xfrm>
+            <a:off x="6562191" y="2569464"/>
+            <a:ext cx="4696815" cy="1417320"/>
+          </a:xfrm>
+          <a:prstGeom prst="rect">
+            <a:avLst/>
+          </a:prstGeom>
+          <a:noFill/>
+        </p:spPr>
+        <p:txBody>
+          <a:bodyPr wrap="square" lIns="0" rIns="0" tIns="0" bIns="0" anchor="t">
+            <a:spAutoFit/>
+          </a:bodyPr>
+          <a:lstStyle/>
+          <a:p>
+            <a:pPr algn="l">
+              <a:lnSpc>
+                <a:spcPct val="130000"/>
+              </a:lnSpc>
+            </a:pPr>
+            <a:r>
+              <a:rPr sz="2500" b="1" i="0">
+                <a:solidFill>
+                  <a:srgbClr val="17181A"/>
+                </a:solidFill>
+                <a:latin typeface="Verdana"/>
+              </a:rPr>
+              <a:t>Nous nous reposons le week-end.</a:t>
+            </a:r>
+          </a:p>
+        </p:txBody>
+      </p:sp>
+      <p:sp>
+        <p:nvSpPr>
+          <p:cNvPr id="13" name="Rounded Rectangle 12"/>
+          <p:cNvSpPr/>
+          <p:nvPr/>
+        </p:nvSpPr>
+        <p:spPr>
+          <a:xfrm>
+            <a:off x="566928" y="4462272"/>
+            <a:ext cx="11057839" cy="1285240"/>
+          </a:xfrm>
+          <a:prstGeom prst="roundRect">
+            <a:avLst>
+              <a:gd name="adj" fmla="val 11383"/>
             </a:avLst>
           </a:prstGeom>
           <a:solidFill>
@@ -5049,97 +5329,14 @@
       </p:sp>
       <p:sp>
         <p:nvSpPr>
-          <p:cNvPr id="9" name="Rounded Rectangle 8"/>
-          <p:cNvSpPr/>
-          <p:nvPr/>
-        </p:nvSpPr>
-        <p:spPr>
-          <a:xfrm>
-            <a:off x="841247" y="2281174"/>
-            <a:ext cx="365760" cy="365760"/>
-          </a:xfrm>
-          <a:prstGeom prst="roundRect">
-            <a:avLst>
-              <a:gd name="adj" fmla="val 32500"/>
-            </a:avLst>
-          </a:prstGeom>
-          <a:solidFill>
-            <a:srgbClr val="FBEEDC"/>
-          </a:solidFill>
-          <a:ln>
-            <a:noFill/>
-          </a:ln>
-          <a:effectLst/>
-        </p:spPr>
-        <p:style>
-          <a:lnRef idx="1">
-            <a:schemeClr val="accent1"/>
-          </a:lnRef>
-          <a:fillRef idx="3">
-            <a:schemeClr val="accent1"/>
-          </a:fillRef>
-          <a:effectRef idx="2">
-            <a:schemeClr val="accent1"/>
-          </a:effectRef>
-          <a:fontRef idx="minor">
-            <a:schemeClr val="lt1"/>
-          </a:fontRef>
-        </p:style>
-        <p:txBody>
-          <a:bodyPr rtlCol="0" anchor="ctr"/>
-          <a:lstStyle/>
-          <a:p/>
-        </p:txBody>
-      </p:sp>
-      <p:sp>
-        <p:nvSpPr>
-          <p:cNvPr id="10" name="TextBox 9"/>
-          <p:cNvSpPr txBox="1"/>
-          <p:nvPr/>
-        </p:nvSpPr>
-        <p:spPr>
-          <a:xfrm>
-            <a:off x="841247" y="2345182"/>
-            <a:ext cx="365760" cy="256032"/>
-          </a:xfrm>
-          <a:prstGeom prst="rect">
-            <a:avLst/>
-          </a:prstGeom>
-          <a:noFill/>
-        </p:spPr>
-        <p:txBody>
-          <a:bodyPr wrap="square" lIns="0" rIns="0" tIns="0" bIns="0" anchor="t">
-            <a:spAutoFit/>
-          </a:bodyPr>
-          <a:lstStyle/>
-          <a:p>
-            <a:pPr algn="ctr">
-              <a:lnSpc>
-                <a:spcPct val="135000"/>
-              </a:lnSpc>
-            </a:pPr>
-            <a:r>
-              <a:rPr sz="1500" b="1" i="0">
-                <a:solidFill>
-                  <a:srgbClr val="B45309"/>
-                </a:solidFill>
-                <a:latin typeface="Verdana"/>
-              </a:rPr>
-              <a:t>1</a:t>
-            </a:r>
-          </a:p>
-        </p:txBody>
-      </p:sp>
-      <p:sp>
-        <p:nvSpPr>
-          <p:cNvPr id="11" name="TextBox 10"/>
-          <p:cNvSpPr txBox="1"/>
-          <p:nvPr/>
-        </p:nvSpPr>
-        <p:spPr>
-          <a:xfrm>
-            <a:off x="1344168" y="2295144"/>
-            <a:ext cx="10097719" cy="374396"/>
+          <p:cNvPr id="14" name="TextBox 13"/>
+          <p:cNvSpPr txBox="1"/>
+          <p:nvPr/>
+        </p:nvSpPr>
+        <p:spPr>
+          <a:xfrm>
+            <a:off x="969264" y="4736592"/>
+            <a:ext cx="10234879" cy="782320"/>
           </a:xfrm>
           <a:prstGeom prst="rect">
             <a:avLst/>
@@ -5154,521 +5351,17 @@
           <a:p>
             <a:pPr algn="l">
               <a:lnSpc>
-                <a:spcPct val="140000"/>
-              </a:lnSpc>
-            </a:pPr>
-            <a:r>
-              <a:rPr sz="1900" b="0" i="0">
-                <a:solidFill>
-                  <a:srgbClr val="3A3D40"/>
-                </a:solidFill>
-                <a:latin typeface="Verdana"/>
-              </a:rPr>
-              <a:t>___ le café du matin. (sentir)</a:t>
-            </a:r>
-          </a:p>
-        </p:txBody>
-      </p:sp>
-      <p:sp>
-        <p:nvSpPr>
-          <p:cNvPr id="12" name="Rounded Rectangle 11"/>
-          <p:cNvSpPr/>
-          <p:nvPr/>
-        </p:nvSpPr>
-        <p:spPr>
-          <a:xfrm>
-            <a:off x="566928" y="2916428"/>
-            <a:ext cx="11057839" cy="648716"/>
-          </a:xfrm>
-          <a:prstGeom prst="roundRect">
-            <a:avLst>
-              <a:gd name="adj" fmla="val 22552"/>
-            </a:avLst>
-          </a:prstGeom>
-          <a:solidFill>
-            <a:srgbClr val="FFFFFF"/>
-          </a:solidFill>
-          <a:ln w="12700">
-            <a:solidFill>
-              <a:srgbClr val="EAEAE8"/>
-            </a:solidFill>
-          </a:ln>
-          <a:effectLst/>
-        </p:spPr>
-        <p:style>
-          <a:lnRef idx="1">
-            <a:schemeClr val="accent1"/>
-          </a:lnRef>
-          <a:fillRef idx="3">
-            <a:schemeClr val="accent1"/>
-          </a:fillRef>
-          <a:effectRef idx="2">
-            <a:schemeClr val="accent1"/>
-          </a:effectRef>
-          <a:fontRef idx="minor">
-            <a:schemeClr val="lt1"/>
-          </a:fontRef>
-        </p:style>
-        <p:txBody>
-          <a:bodyPr rtlCol="0" anchor="ctr"/>
-          <a:lstStyle/>
-          <a:p/>
-        </p:txBody>
-      </p:sp>
-      <p:sp>
-        <p:nvSpPr>
-          <p:cNvPr id="13" name="Rounded Rectangle 12"/>
-          <p:cNvSpPr/>
-          <p:nvPr/>
-        </p:nvSpPr>
-        <p:spPr>
-          <a:xfrm>
-            <a:off x="841247" y="3057905"/>
-            <a:ext cx="365760" cy="365760"/>
-          </a:xfrm>
-          <a:prstGeom prst="roundRect">
-            <a:avLst>
-              <a:gd name="adj" fmla="val 32500"/>
-            </a:avLst>
-          </a:prstGeom>
-          <a:solidFill>
-            <a:srgbClr val="FBEEDC"/>
-          </a:solidFill>
-          <a:ln>
-            <a:noFill/>
-          </a:ln>
-          <a:effectLst/>
-        </p:spPr>
-        <p:style>
-          <a:lnRef idx="1">
-            <a:schemeClr val="accent1"/>
-          </a:lnRef>
-          <a:fillRef idx="3">
-            <a:schemeClr val="accent1"/>
-          </a:fillRef>
-          <a:effectRef idx="2">
-            <a:schemeClr val="accent1"/>
-          </a:effectRef>
-          <a:fontRef idx="minor">
-            <a:schemeClr val="lt1"/>
-          </a:fontRef>
-        </p:style>
-        <p:txBody>
-          <a:bodyPr rtlCol="0" anchor="ctr"/>
-          <a:lstStyle/>
-          <a:p/>
-        </p:txBody>
-      </p:sp>
-      <p:sp>
-        <p:nvSpPr>
-          <p:cNvPr id="14" name="TextBox 13"/>
-          <p:cNvSpPr txBox="1"/>
-          <p:nvPr/>
-        </p:nvSpPr>
-        <p:spPr>
-          <a:xfrm>
-            <a:off x="841247" y="3121913"/>
-            <a:ext cx="365760" cy="256032"/>
-          </a:xfrm>
-          <a:prstGeom prst="rect">
-            <a:avLst/>
-          </a:prstGeom>
-          <a:noFill/>
-        </p:spPr>
-        <p:txBody>
-          <a:bodyPr wrap="square" lIns="0" rIns="0" tIns="0" bIns="0" anchor="t">
-            <a:spAutoFit/>
-          </a:bodyPr>
-          <a:lstStyle/>
-          <a:p>
-            <a:pPr algn="ctr">
-              <a:lnSpc>
-                <a:spcPct val="135000"/>
-              </a:lnSpc>
-            </a:pPr>
-            <a:r>
-              <a:rPr sz="1500" b="1" i="0">
-                <a:solidFill>
-                  <a:srgbClr val="B45309"/>
-                </a:solidFill>
-                <a:latin typeface="Verdana"/>
-              </a:rPr>
-              <a:t>2</a:t>
-            </a:r>
-          </a:p>
-        </p:txBody>
-      </p:sp>
-      <p:sp>
-        <p:nvSpPr>
-          <p:cNvPr id="15" name="TextBox 14"/>
-          <p:cNvSpPr txBox="1"/>
-          <p:nvPr/>
-        </p:nvSpPr>
-        <p:spPr>
-          <a:xfrm>
-            <a:off x="1344168" y="3071876"/>
-            <a:ext cx="10097719" cy="374396"/>
-          </a:xfrm>
-          <a:prstGeom prst="rect">
-            <a:avLst/>
-          </a:prstGeom>
-          <a:noFill/>
-        </p:spPr>
-        <p:txBody>
-          <a:bodyPr wrap="square" lIns="0" rIns="0" tIns="0" bIns="0" anchor="t">
-            <a:spAutoFit/>
-          </a:bodyPr>
-          <a:lstStyle/>
-          <a:p>
-            <a:pPr algn="l">
-              <a:lnSpc>
-                <a:spcPct val="140000"/>
-              </a:lnSpc>
-            </a:pPr>
-            <a:r>
-              <a:rPr sz="1900" b="0" i="0">
-                <a:solidFill>
-                  <a:srgbClr val="3A3D40"/>
-                </a:solidFill>
-                <a:latin typeface="Verdana"/>
-              </a:rPr>
-              <a:t>___ mieux depuis hier. (se sentir)</a:t>
-            </a:r>
-          </a:p>
-        </p:txBody>
-      </p:sp>
-      <p:sp>
-        <p:nvSpPr>
-          <p:cNvPr id="16" name="Rounded Rectangle 15"/>
-          <p:cNvSpPr/>
-          <p:nvPr/>
-        </p:nvSpPr>
-        <p:spPr>
-          <a:xfrm>
-            <a:off x="566928" y="3693160"/>
-            <a:ext cx="11057839" cy="986535"/>
-          </a:xfrm>
-          <a:prstGeom prst="roundRect">
-            <a:avLst>
-              <a:gd name="adj" fmla="val 14830"/>
-            </a:avLst>
-          </a:prstGeom>
-          <a:solidFill>
-            <a:srgbClr val="FFFFFF"/>
-          </a:solidFill>
-          <a:ln w="12700">
-            <a:solidFill>
-              <a:srgbClr val="EAEAE8"/>
-            </a:solidFill>
-          </a:ln>
-          <a:effectLst/>
-        </p:spPr>
-        <p:style>
-          <a:lnRef idx="1">
-            <a:schemeClr val="accent1"/>
-          </a:lnRef>
-          <a:fillRef idx="3">
-            <a:schemeClr val="accent1"/>
-          </a:fillRef>
-          <a:effectRef idx="2">
-            <a:schemeClr val="accent1"/>
-          </a:effectRef>
-          <a:fontRef idx="minor">
-            <a:schemeClr val="lt1"/>
-          </a:fontRef>
-        </p:style>
-        <p:txBody>
-          <a:bodyPr rtlCol="0" anchor="ctr"/>
-          <a:lstStyle/>
-          <a:p/>
-        </p:txBody>
-      </p:sp>
-      <p:sp>
-        <p:nvSpPr>
-          <p:cNvPr id="17" name="Rounded Rectangle 16"/>
-          <p:cNvSpPr/>
-          <p:nvPr/>
-        </p:nvSpPr>
-        <p:spPr>
-          <a:xfrm>
-            <a:off x="841247" y="4003547"/>
-            <a:ext cx="365760" cy="365760"/>
-          </a:xfrm>
-          <a:prstGeom prst="roundRect">
-            <a:avLst>
-              <a:gd name="adj" fmla="val 32500"/>
-            </a:avLst>
-          </a:prstGeom>
-          <a:solidFill>
-            <a:srgbClr val="FBEEDC"/>
-          </a:solidFill>
-          <a:ln>
-            <a:noFill/>
-          </a:ln>
-          <a:effectLst/>
-        </p:spPr>
-        <p:style>
-          <a:lnRef idx="1">
-            <a:schemeClr val="accent1"/>
-          </a:lnRef>
-          <a:fillRef idx="3">
-            <a:schemeClr val="accent1"/>
-          </a:fillRef>
-          <a:effectRef idx="2">
-            <a:schemeClr val="accent1"/>
-          </a:effectRef>
-          <a:fontRef idx="minor">
-            <a:schemeClr val="lt1"/>
-          </a:fontRef>
-        </p:style>
-        <p:txBody>
-          <a:bodyPr rtlCol="0" anchor="ctr"/>
-          <a:lstStyle/>
-          <a:p/>
-        </p:txBody>
-      </p:sp>
-      <p:sp>
-        <p:nvSpPr>
-          <p:cNvPr id="18" name="TextBox 17"/>
-          <p:cNvSpPr txBox="1"/>
-          <p:nvPr/>
-        </p:nvSpPr>
-        <p:spPr>
-          <a:xfrm>
-            <a:off x="841247" y="4067556"/>
-            <a:ext cx="365760" cy="256032"/>
-          </a:xfrm>
-          <a:prstGeom prst="rect">
-            <a:avLst/>
-          </a:prstGeom>
-          <a:noFill/>
-        </p:spPr>
-        <p:txBody>
-          <a:bodyPr wrap="square" lIns="0" rIns="0" tIns="0" bIns="0" anchor="t">
-            <a:spAutoFit/>
-          </a:bodyPr>
-          <a:lstStyle/>
-          <a:p>
-            <a:pPr algn="ctr">
-              <a:lnSpc>
-                <a:spcPct val="135000"/>
-              </a:lnSpc>
-            </a:pPr>
-            <a:r>
-              <a:rPr sz="1500" b="1" i="0">
-                <a:solidFill>
-                  <a:srgbClr val="B45309"/>
-                </a:solidFill>
-                <a:latin typeface="Verdana"/>
-              </a:rPr>
-              <a:t>3</a:t>
-            </a:r>
-          </a:p>
-        </p:txBody>
-      </p:sp>
-      <p:sp>
-        <p:nvSpPr>
-          <p:cNvPr id="19" name="TextBox 18"/>
-          <p:cNvSpPr txBox="1"/>
-          <p:nvPr/>
-        </p:nvSpPr>
-        <p:spPr>
-          <a:xfrm>
-            <a:off x="1344168" y="3848608"/>
-            <a:ext cx="10097719" cy="712215"/>
-          </a:xfrm>
-          <a:prstGeom prst="rect">
-            <a:avLst/>
-          </a:prstGeom>
-          <a:noFill/>
-        </p:spPr>
-        <p:txBody>
-          <a:bodyPr wrap="square" lIns="0" rIns="0" tIns="0" bIns="0" anchor="t">
-            <a:spAutoFit/>
-          </a:bodyPr>
-          <a:lstStyle/>
-          <a:p>
-            <a:pPr algn="l">
-              <a:lnSpc>
-                <a:spcPct val="140000"/>
-              </a:lnSpc>
-            </a:pPr>
-            <a:r>
-              <a:rPr sz="1900" b="0" i="0">
-                <a:solidFill>
-                  <a:srgbClr val="3A3D40"/>
-                </a:solidFill>
-                <a:latin typeface="Verdana"/>
-              </a:rPr>
-              <a:t>___ ma sœur pendant une heure. (reposer / se reposer)</a:t>
-            </a:r>
-          </a:p>
-        </p:txBody>
-      </p:sp>
-      <p:sp>
-        <p:nvSpPr>
-          <p:cNvPr id="20" name="Rounded Rectangle 19"/>
-          <p:cNvSpPr/>
-          <p:nvPr/>
-        </p:nvSpPr>
-        <p:spPr>
-          <a:xfrm>
-            <a:off x="566928" y="4807711"/>
-            <a:ext cx="11057839" cy="648716"/>
-          </a:xfrm>
-          <a:prstGeom prst="roundRect">
-            <a:avLst>
-              <a:gd name="adj" fmla="val 22552"/>
-            </a:avLst>
-          </a:prstGeom>
-          <a:solidFill>
-            <a:srgbClr val="FFFFFF"/>
-          </a:solidFill>
-          <a:ln w="12700">
-            <a:solidFill>
-              <a:srgbClr val="EAEAE8"/>
-            </a:solidFill>
-          </a:ln>
-          <a:effectLst/>
-        </p:spPr>
-        <p:style>
-          <a:lnRef idx="1">
-            <a:schemeClr val="accent1"/>
-          </a:lnRef>
-          <a:fillRef idx="3">
-            <a:schemeClr val="accent1"/>
-          </a:fillRef>
-          <a:effectRef idx="2">
-            <a:schemeClr val="accent1"/>
-          </a:effectRef>
-          <a:fontRef idx="minor">
-            <a:schemeClr val="lt1"/>
-          </a:fontRef>
-        </p:style>
-        <p:txBody>
-          <a:bodyPr rtlCol="0" anchor="ctr"/>
-          <a:lstStyle/>
-          <a:p/>
-        </p:txBody>
-      </p:sp>
-      <p:sp>
-        <p:nvSpPr>
-          <p:cNvPr id="21" name="Rounded Rectangle 20"/>
-          <p:cNvSpPr/>
-          <p:nvPr/>
-        </p:nvSpPr>
-        <p:spPr>
-          <a:xfrm>
-            <a:off x="841247" y="4949190"/>
-            <a:ext cx="365760" cy="365760"/>
-          </a:xfrm>
-          <a:prstGeom prst="roundRect">
-            <a:avLst>
-              <a:gd name="adj" fmla="val 32500"/>
-            </a:avLst>
-          </a:prstGeom>
-          <a:solidFill>
-            <a:srgbClr val="FBEEDC"/>
-          </a:solidFill>
-          <a:ln>
-            <a:noFill/>
-          </a:ln>
-          <a:effectLst/>
-        </p:spPr>
-        <p:style>
-          <a:lnRef idx="1">
-            <a:schemeClr val="accent1"/>
-          </a:lnRef>
-          <a:fillRef idx="3">
-            <a:schemeClr val="accent1"/>
-          </a:fillRef>
-          <a:effectRef idx="2">
-            <a:schemeClr val="accent1"/>
-          </a:effectRef>
-          <a:fontRef idx="minor">
-            <a:schemeClr val="lt1"/>
-          </a:fontRef>
-        </p:style>
-        <p:txBody>
-          <a:bodyPr rtlCol="0" anchor="ctr"/>
-          <a:lstStyle/>
-          <a:p/>
-        </p:txBody>
-      </p:sp>
-      <p:sp>
-        <p:nvSpPr>
-          <p:cNvPr id="22" name="TextBox 21"/>
-          <p:cNvSpPr txBox="1"/>
-          <p:nvPr/>
-        </p:nvSpPr>
-        <p:spPr>
-          <a:xfrm>
-            <a:off x="841247" y="5013198"/>
-            <a:ext cx="365760" cy="256032"/>
-          </a:xfrm>
-          <a:prstGeom prst="rect">
-            <a:avLst/>
-          </a:prstGeom>
-          <a:noFill/>
-        </p:spPr>
-        <p:txBody>
-          <a:bodyPr wrap="square" lIns="0" rIns="0" tIns="0" bIns="0" anchor="t">
-            <a:spAutoFit/>
-          </a:bodyPr>
-          <a:lstStyle/>
-          <a:p>
-            <a:pPr algn="ctr">
-              <a:lnSpc>
-                <a:spcPct val="135000"/>
-              </a:lnSpc>
-            </a:pPr>
-            <a:r>
-              <a:rPr sz="1500" b="1" i="0">
-                <a:solidFill>
-                  <a:srgbClr val="B45309"/>
-                </a:solidFill>
-                <a:latin typeface="Verdana"/>
-              </a:rPr>
-              <a:t>4</a:t>
-            </a:r>
-          </a:p>
-        </p:txBody>
-      </p:sp>
-      <p:sp>
-        <p:nvSpPr>
-          <p:cNvPr id="23" name="TextBox 22"/>
-          <p:cNvSpPr txBox="1"/>
-          <p:nvPr/>
-        </p:nvSpPr>
-        <p:spPr>
-          <a:xfrm>
-            <a:off x="1344168" y="4963159"/>
-            <a:ext cx="10097719" cy="374396"/>
-          </a:xfrm>
-          <a:prstGeom prst="rect">
-            <a:avLst/>
-          </a:prstGeom>
-          <a:noFill/>
-        </p:spPr>
-        <p:txBody>
-          <a:bodyPr wrap="square" lIns="0" rIns="0" tIns="0" bIns="0" anchor="t">
-            <a:spAutoFit/>
-          </a:bodyPr>
-          <a:lstStyle/>
-          <a:p>
-            <a:pPr algn="l">
-              <a:lnSpc>
-                <a:spcPct val="140000"/>
-              </a:lnSpc>
-            </a:pPr>
-            <a:r>
-              <a:rPr sz="1900" b="0" i="0">
-                <a:solidFill>
-                  <a:srgbClr val="3A3D40"/>
-                </a:solidFill>
-                <a:latin typeface="Verdana"/>
-              </a:rPr>
-              <a:t>___ à midi tous les jours. (se réveiller)</a:t>
+                <a:spcPct val="145000"/>
+              </a:lnSpc>
+            </a:pPr>
+            <a:r>
+              <a:rPr sz="2000" b="0" i="0">
+                <a:solidFill>
+                  <a:srgbClr val="4B4F52"/>
+                </a:solidFill>
+                <a:latin typeface="Verdana"/>
+              </a:rPr>
+              <a:t>Le pronom prend toujours la personne du sujet. « Se » n'appartient qu'à la troisième personne — il / elle / ils / elles.</a:t>
             </a:r>
           </a:p>
         </p:txBody>
@@ -5845,7 +5538,7 @@
                 </a:solidFill>
                 <a:latin typeface="Verdana"/>
               </a:rPr>
-              <a:t>CORRECTION</a:t>
+              <a:t>PRATIQUE · 2 DE 4</a:t>
             </a:r>
           </a:p>
         </p:txBody>
@@ -5923,7 +5616,7 @@
                 </a:solidFill>
                 <a:latin typeface="Verdana"/>
               </a:rPr>
-              <a:t>Correction — on lit la réponse, on ne commente pas l'erreur.</a:t>
+              <a:t>Les deux existent. Laquelle convient ici ?</a:t>
             </a:r>
           </a:p>
         </p:txBody>
@@ -5945,7 +5638,7 @@
             </a:avLst>
           </a:prstGeom>
           <a:solidFill>
-            <a:srgbClr val="E6F5EE"/>
+            <a:srgbClr val="FFFFFF"/>
           </a:solidFill>
           <a:ln w="12700">
             <a:solidFill>
@@ -6091,16 +5784,7 @@
                 </a:solidFill>
                 <a:latin typeface="Verdana"/>
               </a:rPr>
-              <a:t>___ le café du matin. (sentir)   </a:t>
-            </a:r>
-            <a:r>
-              <a:rPr sz="1900" b="1" i="0">
-                <a:solidFill>
-                  <a:srgbClr val="07734A"/>
-                </a:solidFill>
-                <a:latin typeface="Verdana"/>
-              </a:rPr>
-              <a:t>» je sens le café — une odeur</a:t>
+              <a:t>___ le café du matin. (sentir)</a:t>
             </a:r>
           </a:p>
         </p:txBody>
@@ -6122,7 +5806,7 @@
             </a:avLst>
           </a:prstGeom>
           <a:solidFill>
-            <a:srgbClr val="E6F5EE"/>
+            <a:srgbClr val="FFFFFF"/>
           </a:solidFill>
           <a:ln w="12700">
             <a:solidFill>
@@ -6268,16 +5952,7 @@
                 </a:solidFill>
                 <a:latin typeface="Verdana"/>
               </a:rPr>
-              <a:t>___ mieux depuis hier. (se sentir)   </a:t>
-            </a:r>
-            <a:r>
-              <a:rPr sz="1900" b="1" i="0">
-                <a:solidFill>
-                  <a:srgbClr val="07734A"/>
-                </a:solidFill>
-                <a:latin typeface="Verdana"/>
-              </a:rPr>
-              <a:t>» je me sens mieux — mon état</a:t>
+              <a:t>___ mieux depuis hier. (se sentir)</a:t>
             </a:r>
           </a:p>
         </p:txBody>
@@ -6299,7 +5974,7 @@
             </a:avLst>
           </a:prstGeom>
           <a:solidFill>
-            <a:srgbClr val="E6F5EE"/>
+            <a:srgbClr val="FFFFFF"/>
           </a:solidFill>
           <a:ln w="12700">
             <a:solidFill>
@@ -6445,16 +6120,7 @@
                 </a:solidFill>
                 <a:latin typeface="Verdana"/>
               </a:rPr>
-              <a:t>___ ma sœur pendant une heure. (reposer / se reposer)   </a:t>
-            </a:r>
-            <a:r>
-              <a:rPr sz="1900" b="1" i="0">
-                <a:solidFill>
-                  <a:srgbClr val="07734A"/>
-                </a:solidFill>
-                <a:latin typeface="Verdana"/>
-              </a:rPr>
-              <a:t>» j'ai attendu ma sœur — attention, ici c'est un autre verbe</a:t>
+              <a:t>___ ma sœur pendant une heure. (reposer / se reposer)</a:t>
             </a:r>
           </a:p>
         </p:txBody>
@@ -6476,7 +6142,7 @@
             </a:avLst>
           </a:prstGeom>
           <a:solidFill>
-            <a:srgbClr val="E6F5EE"/>
+            <a:srgbClr val="FFFFFF"/>
           </a:solidFill>
           <a:ln w="12700">
             <a:solidFill>
@@ -6622,16 +6288,7 @@
                 </a:solidFill>
                 <a:latin typeface="Verdana"/>
               </a:rPr>
-              <a:t>___ à midi tous les jours. (se réveiller)   </a:t>
-            </a:r>
-            <a:r>
-              <a:rPr sz="1900" b="1" i="0">
-                <a:solidFill>
-                  <a:srgbClr val="07734A"/>
-                </a:solidFill>
-                <a:latin typeface="Verdana"/>
-              </a:rPr>
-              <a:t>» il se réveille à midi</a:t>
+              <a:t>___ à midi tous les jours. (se réveiller)</a:t>
             </a:r>
           </a:p>
         </p:txBody>
@@ -6808,7 +6465,7 @@
                 </a:solidFill>
                 <a:latin typeface="Verdana"/>
               </a:rPr>
-              <a:t>PRATIQUE · 3 DE 4</a:t>
+              <a:t>CORRECTION</a:t>
             </a:r>
           </a:p>
         </p:txBody>
@@ -6847,7 +6504,7 @@
                 </a:solidFill>
                 <a:latin typeface="Verdana"/>
               </a:rPr>
-              <a:t>Chez le médecin</a:t>
+              <a:t>Avec ou sans pronom ?</a:t>
             </a:r>
           </a:p>
         </p:txBody>
@@ -6886,7 +6543,7 @@
                 </a:solidFill>
                 <a:latin typeface="Verdana"/>
               </a:rPr>
-              <a:t>Répondez aux questions du médecin, avec un verbe pronominal.</a:t>
+              <a:t>Correction — on lit la réponse, on ne commente pas l'erreur.</a:t>
             </a:r>
           </a:p>
         </p:txBody>
@@ -6908,7 +6565,7 @@
             </a:avLst>
           </a:prstGeom>
           <a:solidFill>
-            <a:srgbClr val="FFFFFF"/>
+            <a:srgbClr val="E6F5EE"/>
           </a:solidFill>
           <a:ln w="12700">
             <a:solidFill>
@@ -7054,7 +6711,16 @@
                 </a:solidFill>
                 <a:latin typeface="Verdana"/>
               </a:rPr>
-              <a:t>« Comment vous sentez-vous aujourd'hui ? »</a:t>
+              <a:t>___ le café du matin. (sentir)   </a:t>
+            </a:r>
+            <a:r>
+              <a:rPr sz="1900" b="1" i="0">
+                <a:solidFill>
+                  <a:srgbClr val="07734A"/>
+                </a:solidFill>
+                <a:latin typeface="Verdana"/>
+              </a:rPr>
+              <a:t>» je sens le café — une odeur</a:t>
             </a:r>
           </a:p>
         </p:txBody>
@@ -7076,7 +6742,7 @@
             </a:avLst>
           </a:prstGeom>
           <a:solidFill>
-            <a:srgbClr val="FFFFFF"/>
+            <a:srgbClr val="E6F5EE"/>
           </a:solidFill>
           <a:ln w="12700">
             <a:solidFill>
@@ -7222,7 +6888,16 @@
                 </a:solidFill>
                 <a:latin typeface="Verdana"/>
               </a:rPr>
-              <a:t>« Est-ce que vous vous reposez assez ? »</a:t>
+              <a:t>___ mieux depuis hier. (se sentir)   </a:t>
+            </a:r>
+            <a:r>
+              <a:rPr sz="1900" b="1" i="0">
+                <a:solidFill>
+                  <a:srgbClr val="07734A"/>
+                </a:solidFill>
+                <a:latin typeface="Verdana"/>
+              </a:rPr>
+              <a:t>» je me sens mieux — mon état</a:t>
             </a:r>
           </a:p>
         </p:txBody>
@@ -7236,15 +6911,15 @@
         <p:spPr>
           <a:xfrm>
             <a:off x="566928" y="3693160"/>
-            <a:ext cx="11057839" cy="648716"/>
+            <a:ext cx="11057839" cy="986535"/>
           </a:xfrm>
           <a:prstGeom prst="roundRect">
             <a:avLst>
-              <a:gd name="adj" fmla="val 22552"/>
+              <a:gd name="adj" fmla="val 14830"/>
             </a:avLst>
           </a:prstGeom>
           <a:solidFill>
-            <a:srgbClr val="FFFFFF"/>
+            <a:srgbClr val="E6F5EE"/>
           </a:solidFill>
           <a:ln w="12700">
             <a:solidFill>
@@ -7281,7 +6956,7 @@
         </p:nvSpPr>
         <p:spPr>
           <a:xfrm>
-            <a:off x="841247" y="3834638"/>
+            <a:off x="841247" y="4003547"/>
             <a:ext cx="365760" cy="365760"/>
           </a:xfrm>
           <a:prstGeom prst="roundRect">
@@ -7325,7 +7000,7 @@
         </p:nvSpPr>
         <p:spPr>
           <a:xfrm>
-            <a:off x="841247" y="3898646"/>
+            <a:off x="841247" y="4067556"/>
             <a:ext cx="365760" cy="256032"/>
           </a:xfrm>
           <a:prstGeom prst="rect">
@@ -7365,7 +7040,7 @@
         <p:spPr>
           <a:xfrm>
             <a:off x="1344168" y="3848608"/>
-            <a:ext cx="10097719" cy="374396"/>
+            <a:ext cx="10097719" cy="712215"/>
           </a:xfrm>
           <a:prstGeom prst="rect">
             <a:avLst/>
@@ -7390,7 +7065,16 @@
                 </a:solidFill>
                 <a:latin typeface="Verdana"/>
               </a:rPr>
-              <a:t>« Vous réveillez-vous la nuit ? »</a:t>
+              <a:t>___ ma sœur pendant une heure. (reposer / se reposer)   </a:t>
+            </a:r>
+            <a:r>
+              <a:rPr sz="1900" b="1" i="0">
+                <a:solidFill>
+                  <a:srgbClr val="07734A"/>
+                </a:solidFill>
+                <a:latin typeface="Verdana"/>
+              </a:rPr>
+              <a:t>» j'ai attendu ma sœur — attention, ici c'est un autre verbe</a:t>
             </a:r>
           </a:p>
         </p:txBody>
@@ -7403,16 +7087,16 @@
         </p:nvSpPr>
         <p:spPr>
           <a:xfrm>
-            <a:off x="566928" y="4469892"/>
-            <a:ext cx="11057839" cy="986535"/>
+            <a:off x="566928" y="4807711"/>
+            <a:ext cx="11057839" cy="648716"/>
           </a:xfrm>
           <a:prstGeom prst="roundRect">
             <a:avLst>
-              <a:gd name="adj" fmla="val 14830"/>
+              <a:gd name="adj" fmla="val 22552"/>
             </a:avLst>
           </a:prstGeom>
           <a:solidFill>
-            <a:srgbClr val="FFFFFF"/>
+            <a:srgbClr val="E6F5EE"/>
           </a:solidFill>
           <a:ln w="12700">
             <a:solidFill>
@@ -7449,7 +7133,7 @@
         </p:nvSpPr>
         <p:spPr>
           <a:xfrm>
-            <a:off x="841247" y="4780280"/>
+            <a:off x="841247" y="4949190"/>
             <a:ext cx="365760" cy="365760"/>
           </a:xfrm>
           <a:prstGeom prst="roundRect">
@@ -7493,7 +7177,7 @@
         </p:nvSpPr>
         <p:spPr>
           <a:xfrm>
-            <a:off x="841247" y="4844288"/>
+            <a:off x="841247" y="5013198"/>
             <a:ext cx="365760" cy="256032"/>
           </a:xfrm>
           <a:prstGeom prst="rect">
@@ -7532,8 +7216,8 @@
         </p:nvSpPr>
         <p:spPr>
           <a:xfrm>
-            <a:off x="1344168" y="4625340"/>
-            <a:ext cx="10097719" cy="712215"/>
+            <a:off x="1344168" y="4963159"/>
+            <a:ext cx="10097719" cy="374396"/>
           </a:xfrm>
           <a:prstGeom prst="rect">
             <a:avLst/>
@@ -7558,7 +7242,16 @@
                 </a:solidFill>
                 <a:latin typeface="Verdana"/>
               </a:rPr>
-              <a:t>« Est-ce que vous vous inquiétez pour votre santé ? »</a:t>
+              <a:t>___ à midi tous les jours. (se réveiller)   </a:t>
+            </a:r>
+            <a:r>
+              <a:rPr sz="1900" b="1" i="0">
+                <a:solidFill>
+                  <a:srgbClr val="07734A"/>
+                </a:solidFill>
+                <a:latin typeface="Verdana"/>
+              </a:rPr>
+              <a:t>» il se réveille à midi</a:t>
             </a:r>
           </a:p>
         </p:txBody>
@@ -7735,7 +7428,7 @@
                 </a:solidFill>
                 <a:latin typeface="Verdana"/>
               </a:rPr>
-              <a:t>CORRECTION</a:t>
+              <a:t>PRATIQUE · 3 DE 4</a:t>
             </a:r>
           </a:p>
         </p:txBody>
@@ -7813,7 +7506,7 @@
                 </a:solidFill>
                 <a:latin typeface="Verdana"/>
               </a:rPr>
-              <a:t>Correction — on lit la réponse, on ne commente pas l'erreur.</a:t>
+              <a:t>Répondez aux questions du médecin, avec un verbe pronominal.</a:t>
             </a:r>
           </a:p>
         </p:txBody>
@@ -7835,7 +7528,7 @@
             </a:avLst>
           </a:prstGeom>
           <a:solidFill>
-            <a:srgbClr val="E6F5EE"/>
+            <a:srgbClr val="FFFFFF"/>
           </a:solidFill>
           <a:ln w="12700">
             <a:solidFill>
@@ -7981,16 +7674,7 @@
                 </a:solidFill>
                 <a:latin typeface="Verdana"/>
               </a:rPr>
-              <a:t>« Comment vous sentez-vous aujourd'hui ? »   </a:t>
-            </a:r>
-            <a:r>
-              <a:rPr sz="1900" b="1" i="0">
-                <a:solidFill>
-                  <a:srgbClr val="07734A"/>
-                </a:solidFill>
-                <a:latin typeface="Verdana"/>
-              </a:rPr>
-              <a:t>» Je me sens un peu mieux.</a:t>
+              <a:t>« Comment vous sentez-vous aujourd'hui ? »</a:t>
             </a:r>
           </a:p>
         </p:txBody>
@@ -8012,7 +7696,7 @@
             </a:avLst>
           </a:prstGeom>
           <a:solidFill>
-            <a:srgbClr val="E6F5EE"/>
+            <a:srgbClr val="FFFFFF"/>
           </a:solidFill>
           <a:ln w="12700">
             <a:solidFill>
@@ -8158,16 +7842,7 @@
                 </a:solidFill>
                 <a:latin typeface="Verdana"/>
               </a:rPr>
-              <a:t>« Est-ce que vous vous reposez assez ? »   </a:t>
-            </a:r>
-            <a:r>
-              <a:rPr sz="1900" b="1" i="0">
-                <a:solidFill>
-                  <a:srgbClr val="07734A"/>
-                </a:solidFill>
-                <a:latin typeface="Verdana"/>
-              </a:rPr>
-              <a:t>» Non, je me repose très peu.</a:t>
+              <a:t>« Est-ce que vous vous reposez assez ? »</a:t>
             </a:r>
           </a:p>
         </p:txBody>
@@ -8189,7 +7864,7 @@
             </a:avLst>
           </a:prstGeom>
           <a:solidFill>
-            <a:srgbClr val="E6F5EE"/>
+            <a:srgbClr val="FFFFFF"/>
           </a:solidFill>
           <a:ln w="12700">
             <a:solidFill>
@@ -8335,16 +8010,7 @@
                 </a:solidFill>
                 <a:latin typeface="Verdana"/>
               </a:rPr>
-              <a:t>« Vous réveillez-vous la nuit ? »   </a:t>
-            </a:r>
-            <a:r>
-              <a:rPr sz="1900" b="1" i="0">
-                <a:solidFill>
-                  <a:srgbClr val="07734A"/>
-                </a:solidFill>
-                <a:latin typeface="Verdana"/>
-              </a:rPr>
-              <a:t>» Oui, je me réveille deux ou trois fois.</a:t>
+              <a:t>« Vous réveillez-vous la nuit ? »</a:t>
             </a:r>
           </a:p>
         </p:txBody>
@@ -8366,7 +8032,7 @@
             </a:avLst>
           </a:prstGeom>
           <a:solidFill>
-            <a:srgbClr val="E6F5EE"/>
+            <a:srgbClr val="FFFFFF"/>
           </a:solidFill>
           <a:ln w="12700">
             <a:solidFill>
@@ -8512,16 +8178,7 @@
                 </a:solidFill>
                 <a:latin typeface="Verdana"/>
               </a:rPr>
-              <a:t>« Est-ce que vous vous inquiétez pour votre santé ? »   </a:t>
-            </a:r>
-            <a:r>
-              <a:rPr sz="1900" b="1" i="0">
-                <a:solidFill>
-                  <a:srgbClr val="07734A"/>
-                </a:solidFill>
-                <a:latin typeface="Verdana"/>
-              </a:rPr>
-              <a:t>» Oui, je m'inquiète un peu.</a:t>
+              <a:t>« Est-ce que vous vous inquiétez pour votre santé ? »</a:t>
             </a:r>
           </a:p>
         </p:txBody>
@@ -8698,7 +8355,7 @@
                 </a:solidFill>
                 <a:latin typeface="Verdana"/>
               </a:rPr>
-              <a:t>PRATIQUE · 4 DE 4</a:t>
+              <a:t>CORRECTION</a:t>
             </a:r>
           </a:p>
         </p:txBody>
@@ -8737,7 +8394,7 @@
                 </a:solidFill>
                 <a:latin typeface="Verdana"/>
               </a:rPr>
-              <a:t>Votre semaine, en trois phrases</a:t>
+              <a:t>Chez le médecin</a:t>
             </a:r>
           </a:p>
         </p:txBody>
@@ -8776,7 +8433,7 @@
                 </a:solidFill>
                 <a:latin typeface="Verdana"/>
               </a:rPr>
-              <a:t>Trois verbes pronominaux, sur vous.</a:t>
+              <a:t>Correction — on lit la réponse, on ne commente pas l'erreur.</a:t>
             </a:r>
           </a:p>
         </p:txBody>
@@ -8798,7 +8455,7 @@
             </a:avLst>
           </a:prstGeom>
           <a:solidFill>
-            <a:srgbClr val="FFFFFF"/>
+            <a:srgbClr val="E6F5EE"/>
           </a:solidFill>
           <a:ln w="12700">
             <a:solidFill>
@@ -8944,7 +8601,16 @@
                 </a:solidFill>
                 <a:latin typeface="Verdana"/>
               </a:rPr>
-              <a:t>Comment vous vous sentez</a:t>
+              <a:t>« Comment vous sentez-vous aujourd'hui ? »   </a:t>
+            </a:r>
+            <a:r>
+              <a:rPr sz="1900" b="1" i="0">
+                <a:solidFill>
+                  <a:srgbClr val="07734A"/>
+                </a:solidFill>
+                <a:latin typeface="Verdana"/>
+              </a:rPr>
+              <a:t>» Je me sens un peu mieux.</a:t>
             </a:r>
           </a:p>
         </p:txBody>
@@ -8966,7 +8632,7 @@
             </a:avLst>
           </a:prstGeom>
           <a:solidFill>
-            <a:srgbClr val="FFFFFF"/>
+            <a:srgbClr val="E6F5EE"/>
           </a:solidFill>
           <a:ln w="12700">
             <a:solidFill>
@@ -9112,7 +8778,16 @@
                 </a:solidFill>
                 <a:latin typeface="Verdana"/>
               </a:rPr>
-              <a:t>Quand vous vous reposez</a:t>
+              <a:t>« Est-ce que vous vous reposez assez ? »   </a:t>
+            </a:r>
+            <a:r>
+              <a:rPr sz="1900" b="1" i="0">
+                <a:solidFill>
+                  <a:srgbClr val="07734A"/>
+                </a:solidFill>
+                <a:latin typeface="Verdana"/>
+              </a:rPr>
+              <a:t>» Non, je me repose très peu.</a:t>
             </a:r>
           </a:p>
         </p:txBody>
@@ -9134,7 +8809,7 @@
             </a:avLst>
           </a:prstGeom>
           <a:solidFill>
-            <a:srgbClr val="FFFFFF"/>
+            <a:srgbClr val="E6F5EE"/>
           </a:solidFill>
           <a:ln w="12700">
             <a:solidFill>
@@ -9280,7 +8955,193 @@
                 </a:solidFill>
                 <a:latin typeface="Verdana"/>
               </a:rPr>
-              <a:t>À quelle heure vous vous réveillez</a:t>
+              <a:t>« Vous réveillez-vous la nuit ? »   </a:t>
+            </a:r>
+            <a:r>
+              <a:rPr sz="1900" b="1" i="0">
+                <a:solidFill>
+                  <a:srgbClr val="07734A"/>
+                </a:solidFill>
+                <a:latin typeface="Verdana"/>
+              </a:rPr>
+              <a:t>» Oui, je me réveille deux ou trois fois.</a:t>
+            </a:r>
+          </a:p>
+        </p:txBody>
+      </p:sp>
+      <p:sp>
+        <p:nvSpPr>
+          <p:cNvPr id="20" name="Rounded Rectangle 19"/>
+          <p:cNvSpPr/>
+          <p:nvPr/>
+        </p:nvSpPr>
+        <p:spPr>
+          <a:xfrm>
+            <a:off x="566928" y="4469892"/>
+            <a:ext cx="11057839" cy="986535"/>
+          </a:xfrm>
+          <a:prstGeom prst="roundRect">
+            <a:avLst>
+              <a:gd name="adj" fmla="val 14830"/>
+            </a:avLst>
+          </a:prstGeom>
+          <a:solidFill>
+            <a:srgbClr val="E6F5EE"/>
+          </a:solidFill>
+          <a:ln w="12700">
+            <a:solidFill>
+              <a:srgbClr val="EAEAE8"/>
+            </a:solidFill>
+          </a:ln>
+          <a:effectLst/>
+        </p:spPr>
+        <p:style>
+          <a:lnRef idx="1">
+            <a:schemeClr val="accent1"/>
+          </a:lnRef>
+          <a:fillRef idx="3">
+            <a:schemeClr val="accent1"/>
+          </a:fillRef>
+          <a:effectRef idx="2">
+            <a:schemeClr val="accent1"/>
+          </a:effectRef>
+          <a:fontRef idx="minor">
+            <a:schemeClr val="lt1"/>
+          </a:fontRef>
+        </p:style>
+        <p:txBody>
+          <a:bodyPr rtlCol="0" anchor="ctr"/>
+          <a:lstStyle/>
+          <a:p/>
+        </p:txBody>
+      </p:sp>
+      <p:sp>
+        <p:nvSpPr>
+          <p:cNvPr id="21" name="Rounded Rectangle 20"/>
+          <p:cNvSpPr/>
+          <p:nvPr/>
+        </p:nvSpPr>
+        <p:spPr>
+          <a:xfrm>
+            <a:off x="841247" y="4780280"/>
+            <a:ext cx="365760" cy="365760"/>
+          </a:xfrm>
+          <a:prstGeom prst="roundRect">
+            <a:avLst>
+              <a:gd name="adj" fmla="val 32500"/>
+            </a:avLst>
+          </a:prstGeom>
+          <a:solidFill>
+            <a:srgbClr val="FBEEDC"/>
+          </a:solidFill>
+          <a:ln>
+            <a:noFill/>
+          </a:ln>
+          <a:effectLst/>
+        </p:spPr>
+        <p:style>
+          <a:lnRef idx="1">
+            <a:schemeClr val="accent1"/>
+          </a:lnRef>
+          <a:fillRef idx="3">
+            <a:schemeClr val="accent1"/>
+          </a:fillRef>
+          <a:effectRef idx="2">
+            <a:schemeClr val="accent1"/>
+          </a:effectRef>
+          <a:fontRef idx="minor">
+            <a:schemeClr val="lt1"/>
+          </a:fontRef>
+        </p:style>
+        <p:txBody>
+          <a:bodyPr rtlCol="0" anchor="ctr"/>
+          <a:lstStyle/>
+          <a:p/>
+        </p:txBody>
+      </p:sp>
+      <p:sp>
+        <p:nvSpPr>
+          <p:cNvPr id="22" name="TextBox 21"/>
+          <p:cNvSpPr txBox="1"/>
+          <p:nvPr/>
+        </p:nvSpPr>
+        <p:spPr>
+          <a:xfrm>
+            <a:off x="841247" y="4844288"/>
+            <a:ext cx="365760" cy="256032"/>
+          </a:xfrm>
+          <a:prstGeom prst="rect">
+            <a:avLst/>
+          </a:prstGeom>
+          <a:noFill/>
+        </p:spPr>
+        <p:txBody>
+          <a:bodyPr wrap="square" lIns="0" rIns="0" tIns="0" bIns="0" anchor="t">
+            <a:spAutoFit/>
+          </a:bodyPr>
+          <a:lstStyle/>
+          <a:p>
+            <a:pPr algn="ctr">
+              <a:lnSpc>
+                <a:spcPct val="135000"/>
+              </a:lnSpc>
+            </a:pPr>
+            <a:r>
+              <a:rPr sz="1500" b="1" i="0">
+                <a:solidFill>
+                  <a:srgbClr val="B45309"/>
+                </a:solidFill>
+                <a:latin typeface="Verdana"/>
+              </a:rPr>
+              <a:t>4</a:t>
+            </a:r>
+          </a:p>
+        </p:txBody>
+      </p:sp>
+      <p:sp>
+        <p:nvSpPr>
+          <p:cNvPr id="23" name="TextBox 22"/>
+          <p:cNvSpPr txBox="1"/>
+          <p:nvPr/>
+        </p:nvSpPr>
+        <p:spPr>
+          <a:xfrm>
+            <a:off x="1344168" y="4625340"/>
+            <a:ext cx="10097719" cy="712215"/>
+          </a:xfrm>
+          <a:prstGeom prst="rect">
+            <a:avLst/>
+          </a:prstGeom>
+          <a:noFill/>
+        </p:spPr>
+        <p:txBody>
+          <a:bodyPr wrap="square" lIns="0" rIns="0" tIns="0" bIns="0" anchor="t">
+            <a:spAutoFit/>
+          </a:bodyPr>
+          <a:lstStyle/>
+          <a:p>
+            <a:pPr algn="l">
+              <a:lnSpc>
+                <a:spcPct val="140000"/>
+              </a:lnSpc>
+            </a:pPr>
+            <a:r>
+              <a:rPr sz="1900" b="0" i="0">
+                <a:solidFill>
+                  <a:srgbClr val="3A3D40"/>
+                </a:solidFill>
+                <a:latin typeface="Verdana"/>
+              </a:rPr>
+              <a:t>« Est-ce que vous vous inquiétez pour votre santé ? »   </a:t>
+            </a:r>
+            <a:r>
+              <a:rPr sz="1900" b="1" i="0">
+                <a:solidFill>
+                  <a:srgbClr val="07734A"/>
+                </a:solidFill>
+                <a:latin typeface="Verdana"/>
+              </a:rPr>
+              <a:t>» Oui, je m'inquiète un peu.</a:t>
             </a:r>
           </a:p>
         </p:txBody>
@@ -9425,6 +9286,765 @@
       </p:sp>
       <p:sp>
         <p:nvSpPr>
+          <p:cNvPr id="5" name="TextBox 4"/>
+          <p:cNvSpPr txBox="1"/>
+          <p:nvPr/>
+        </p:nvSpPr>
+        <p:spPr>
+          <a:xfrm>
+            <a:off x="566928" y="420624"/>
+            <a:ext cx="11057839" cy="237744"/>
+          </a:xfrm>
+          <a:prstGeom prst="rect">
+            <a:avLst/>
+          </a:prstGeom>
+          <a:noFill/>
+        </p:spPr>
+        <p:txBody>
+          <a:bodyPr wrap="square" lIns="0" rIns="0" tIns="0" bIns="0" anchor="t">
+            <a:spAutoFit/>
+          </a:bodyPr>
+          <a:lstStyle/>
+          <a:p>
+            <a:pPr algn="l">
+              <a:lnSpc>
+                <a:spcPct val="135000"/>
+              </a:lnSpc>
+            </a:pPr>
+            <a:r>
+              <a:rPr sz="1300" b="1" i="0" spc="156">
+                <a:solidFill>
+                  <a:srgbClr val="B45309"/>
+                </a:solidFill>
+                <a:latin typeface="Verdana"/>
+              </a:rPr>
+              <a:t>PRATIQUE · 4 DE 4</a:t>
+            </a:r>
+          </a:p>
+        </p:txBody>
+      </p:sp>
+      <p:sp>
+        <p:nvSpPr>
+          <p:cNvPr id="6" name="TextBox 5"/>
+          <p:cNvSpPr txBox="1"/>
+          <p:nvPr/>
+        </p:nvSpPr>
+        <p:spPr>
+          <a:xfrm>
+            <a:off x="566928" y="749808"/>
+            <a:ext cx="11057839" cy="877824"/>
+          </a:xfrm>
+          <a:prstGeom prst="rect">
+            <a:avLst/>
+          </a:prstGeom>
+          <a:noFill/>
+        </p:spPr>
+        <p:txBody>
+          <a:bodyPr wrap="square" lIns="0" rIns="0" tIns="0" bIns="0" anchor="t">
+            <a:spAutoFit/>
+          </a:bodyPr>
+          <a:lstStyle/>
+          <a:p>
+            <a:pPr algn="l">
+              <a:lnSpc>
+                <a:spcPct val="115000"/>
+              </a:lnSpc>
+            </a:pPr>
+            <a:r>
+              <a:rPr sz="3400" b="1" i="0">
+                <a:solidFill>
+                  <a:srgbClr val="17181A"/>
+                </a:solidFill>
+                <a:latin typeface="Verdana"/>
+              </a:rPr>
+              <a:t>Votre semaine, en trois phrases</a:t>
+            </a:r>
+          </a:p>
+        </p:txBody>
+      </p:sp>
+      <p:sp>
+        <p:nvSpPr>
+          <p:cNvPr id="7" name="TextBox 6"/>
+          <p:cNvSpPr txBox="1"/>
+          <p:nvPr/>
+        </p:nvSpPr>
+        <p:spPr>
+          <a:xfrm>
+            <a:off x="566928" y="1645920"/>
+            <a:ext cx="11057839" cy="329184"/>
+          </a:xfrm>
+          <a:prstGeom prst="rect">
+            <a:avLst/>
+          </a:prstGeom>
+          <a:noFill/>
+        </p:spPr>
+        <p:txBody>
+          <a:bodyPr wrap="square" lIns="0" rIns="0" tIns="0" bIns="0" anchor="t">
+            <a:spAutoFit/>
+          </a:bodyPr>
+          <a:lstStyle/>
+          <a:p>
+            <a:pPr algn="l">
+              <a:lnSpc>
+                <a:spcPct val="135000"/>
+              </a:lnSpc>
+            </a:pPr>
+            <a:r>
+              <a:rPr sz="1800" b="0" i="0">
+                <a:solidFill>
+                  <a:srgbClr val="6E7175"/>
+                </a:solidFill>
+                <a:latin typeface="Verdana"/>
+              </a:rPr>
+              <a:t>Trois verbes pronominaux, sur vous.</a:t>
+            </a:r>
+          </a:p>
+        </p:txBody>
+      </p:sp>
+      <p:sp>
+        <p:nvSpPr>
+          <p:cNvPr id="8" name="Rounded Rectangle 7"/>
+          <p:cNvSpPr/>
+          <p:nvPr/>
+        </p:nvSpPr>
+        <p:spPr>
+          <a:xfrm>
+            <a:off x="566928" y="2139696"/>
+            <a:ext cx="11057839" cy="648716"/>
+          </a:xfrm>
+          <a:prstGeom prst="roundRect">
+            <a:avLst>
+              <a:gd name="adj" fmla="val 22552"/>
+            </a:avLst>
+          </a:prstGeom>
+          <a:solidFill>
+            <a:srgbClr val="FFFFFF"/>
+          </a:solidFill>
+          <a:ln w="12700">
+            <a:solidFill>
+              <a:srgbClr val="EAEAE8"/>
+            </a:solidFill>
+          </a:ln>
+          <a:effectLst/>
+        </p:spPr>
+        <p:style>
+          <a:lnRef idx="1">
+            <a:schemeClr val="accent1"/>
+          </a:lnRef>
+          <a:fillRef idx="3">
+            <a:schemeClr val="accent1"/>
+          </a:fillRef>
+          <a:effectRef idx="2">
+            <a:schemeClr val="accent1"/>
+          </a:effectRef>
+          <a:fontRef idx="minor">
+            <a:schemeClr val="lt1"/>
+          </a:fontRef>
+        </p:style>
+        <p:txBody>
+          <a:bodyPr rtlCol="0" anchor="ctr"/>
+          <a:lstStyle/>
+          <a:p/>
+        </p:txBody>
+      </p:sp>
+      <p:sp>
+        <p:nvSpPr>
+          <p:cNvPr id="9" name="Rounded Rectangle 8"/>
+          <p:cNvSpPr/>
+          <p:nvPr/>
+        </p:nvSpPr>
+        <p:spPr>
+          <a:xfrm>
+            <a:off x="841247" y="2281174"/>
+            <a:ext cx="365760" cy="365760"/>
+          </a:xfrm>
+          <a:prstGeom prst="roundRect">
+            <a:avLst>
+              <a:gd name="adj" fmla="val 32500"/>
+            </a:avLst>
+          </a:prstGeom>
+          <a:solidFill>
+            <a:srgbClr val="FBEEDC"/>
+          </a:solidFill>
+          <a:ln>
+            <a:noFill/>
+          </a:ln>
+          <a:effectLst/>
+        </p:spPr>
+        <p:style>
+          <a:lnRef idx="1">
+            <a:schemeClr val="accent1"/>
+          </a:lnRef>
+          <a:fillRef idx="3">
+            <a:schemeClr val="accent1"/>
+          </a:fillRef>
+          <a:effectRef idx="2">
+            <a:schemeClr val="accent1"/>
+          </a:effectRef>
+          <a:fontRef idx="minor">
+            <a:schemeClr val="lt1"/>
+          </a:fontRef>
+        </p:style>
+        <p:txBody>
+          <a:bodyPr rtlCol="0" anchor="ctr"/>
+          <a:lstStyle/>
+          <a:p/>
+        </p:txBody>
+      </p:sp>
+      <p:sp>
+        <p:nvSpPr>
+          <p:cNvPr id="10" name="TextBox 9"/>
+          <p:cNvSpPr txBox="1"/>
+          <p:nvPr/>
+        </p:nvSpPr>
+        <p:spPr>
+          <a:xfrm>
+            <a:off x="841247" y="2345182"/>
+            <a:ext cx="365760" cy="256032"/>
+          </a:xfrm>
+          <a:prstGeom prst="rect">
+            <a:avLst/>
+          </a:prstGeom>
+          <a:noFill/>
+        </p:spPr>
+        <p:txBody>
+          <a:bodyPr wrap="square" lIns="0" rIns="0" tIns="0" bIns="0" anchor="t">
+            <a:spAutoFit/>
+          </a:bodyPr>
+          <a:lstStyle/>
+          <a:p>
+            <a:pPr algn="ctr">
+              <a:lnSpc>
+                <a:spcPct val="135000"/>
+              </a:lnSpc>
+            </a:pPr>
+            <a:r>
+              <a:rPr sz="1500" b="1" i="0">
+                <a:solidFill>
+                  <a:srgbClr val="B45309"/>
+                </a:solidFill>
+                <a:latin typeface="Verdana"/>
+              </a:rPr>
+              <a:t>1</a:t>
+            </a:r>
+          </a:p>
+        </p:txBody>
+      </p:sp>
+      <p:sp>
+        <p:nvSpPr>
+          <p:cNvPr id="11" name="TextBox 10"/>
+          <p:cNvSpPr txBox="1"/>
+          <p:nvPr/>
+        </p:nvSpPr>
+        <p:spPr>
+          <a:xfrm>
+            <a:off x="1344168" y="2295144"/>
+            <a:ext cx="10097719" cy="374396"/>
+          </a:xfrm>
+          <a:prstGeom prst="rect">
+            <a:avLst/>
+          </a:prstGeom>
+          <a:noFill/>
+        </p:spPr>
+        <p:txBody>
+          <a:bodyPr wrap="square" lIns="0" rIns="0" tIns="0" bIns="0" anchor="t">
+            <a:spAutoFit/>
+          </a:bodyPr>
+          <a:lstStyle/>
+          <a:p>
+            <a:pPr algn="l">
+              <a:lnSpc>
+                <a:spcPct val="140000"/>
+              </a:lnSpc>
+            </a:pPr>
+            <a:r>
+              <a:rPr sz="1900" b="0" i="0">
+                <a:solidFill>
+                  <a:srgbClr val="3A3D40"/>
+                </a:solidFill>
+                <a:latin typeface="Verdana"/>
+              </a:rPr>
+              <a:t>Comment vous vous sentez</a:t>
+            </a:r>
+          </a:p>
+        </p:txBody>
+      </p:sp>
+      <p:sp>
+        <p:nvSpPr>
+          <p:cNvPr id="12" name="Rounded Rectangle 11"/>
+          <p:cNvSpPr/>
+          <p:nvPr/>
+        </p:nvSpPr>
+        <p:spPr>
+          <a:xfrm>
+            <a:off x="566928" y="2916428"/>
+            <a:ext cx="11057839" cy="648716"/>
+          </a:xfrm>
+          <a:prstGeom prst="roundRect">
+            <a:avLst>
+              <a:gd name="adj" fmla="val 22552"/>
+            </a:avLst>
+          </a:prstGeom>
+          <a:solidFill>
+            <a:srgbClr val="FFFFFF"/>
+          </a:solidFill>
+          <a:ln w="12700">
+            <a:solidFill>
+              <a:srgbClr val="EAEAE8"/>
+            </a:solidFill>
+          </a:ln>
+          <a:effectLst/>
+        </p:spPr>
+        <p:style>
+          <a:lnRef idx="1">
+            <a:schemeClr val="accent1"/>
+          </a:lnRef>
+          <a:fillRef idx="3">
+            <a:schemeClr val="accent1"/>
+          </a:fillRef>
+          <a:effectRef idx="2">
+            <a:schemeClr val="accent1"/>
+          </a:effectRef>
+          <a:fontRef idx="minor">
+            <a:schemeClr val="lt1"/>
+          </a:fontRef>
+        </p:style>
+        <p:txBody>
+          <a:bodyPr rtlCol="0" anchor="ctr"/>
+          <a:lstStyle/>
+          <a:p/>
+        </p:txBody>
+      </p:sp>
+      <p:sp>
+        <p:nvSpPr>
+          <p:cNvPr id="13" name="Rounded Rectangle 12"/>
+          <p:cNvSpPr/>
+          <p:nvPr/>
+        </p:nvSpPr>
+        <p:spPr>
+          <a:xfrm>
+            <a:off x="841247" y="3057905"/>
+            <a:ext cx="365760" cy="365760"/>
+          </a:xfrm>
+          <a:prstGeom prst="roundRect">
+            <a:avLst>
+              <a:gd name="adj" fmla="val 32500"/>
+            </a:avLst>
+          </a:prstGeom>
+          <a:solidFill>
+            <a:srgbClr val="FBEEDC"/>
+          </a:solidFill>
+          <a:ln>
+            <a:noFill/>
+          </a:ln>
+          <a:effectLst/>
+        </p:spPr>
+        <p:style>
+          <a:lnRef idx="1">
+            <a:schemeClr val="accent1"/>
+          </a:lnRef>
+          <a:fillRef idx="3">
+            <a:schemeClr val="accent1"/>
+          </a:fillRef>
+          <a:effectRef idx="2">
+            <a:schemeClr val="accent1"/>
+          </a:effectRef>
+          <a:fontRef idx="minor">
+            <a:schemeClr val="lt1"/>
+          </a:fontRef>
+        </p:style>
+        <p:txBody>
+          <a:bodyPr rtlCol="0" anchor="ctr"/>
+          <a:lstStyle/>
+          <a:p/>
+        </p:txBody>
+      </p:sp>
+      <p:sp>
+        <p:nvSpPr>
+          <p:cNvPr id="14" name="TextBox 13"/>
+          <p:cNvSpPr txBox="1"/>
+          <p:nvPr/>
+        </p:nvSpPr>
+        <p:spPr>
+          <a:xfrm>
+            <a:off x="841247" y="3121913"/>
+            <a:ext cx="365760" cy="256032"/>
+          </a:xfrm>
+          <a:prstGeom prst="rect">
+            <a:avLst/>
+          </a:prstGeom>
+          <a:noFill/>
+        </p:spPr>
+        <p:txBody>
+          <a:bodyPr wrap="square" lIns="0" rIns="0" tIns="0" bIns="0" anchor="t">
+            <a:spAutoFit/>
+          </a:bodyPr>
+          <a:lstStyle/>
+          <a:p>
+            <a:pPr algn="ctr">
+              <a:lnSpc>
+                <a:spcPct val="135000"/>
+              </a:lnSpc>
+            </a:pPr>
+            <a:r>
+              <a:rPr sz="1500" b="1" i="0">
+                <a:solidFill>
+                  <a:srgbClr val="B45309"/>
+                </a:solidFill>
+                <a:latin typeface="Verdana"/>
+              </a:rPr>
+              <a:t>2</a:t>
+            </a:r>
+          </a:p>
+        </p:txBody>
+      </p:sp>
+      <p:sp>
+        <p:nvSpPr>
+          <p:cNvPr id="15" name="TextBox 14"/>
+          <p:cNvSpPr txBox="1"/>
+          <p:nvPr/>
+        </p:nvSpPr>
+        <p:spPr>
+          <a:xfrm>
+            <a:off x="1344168" y="3071876"/>
+            <a:ext cx="10097719" cy="374396"/>
+          </a:xfrm>
+          <a:prstGeom prst="rect">
+            <a:avLst/>
+          </a:prstGeom>
+          <a:noFill/>
+        </p:spPr>
+        <p:txBody>
+          <a:bodyPr wrap="square" lIns="0" rIns="0" tIns="0" bIns="0" anchor="t">
+            <a:spAutoFit/>
+          </a:bodyPr>
+          <a:lstStyle/>
+          <a:p>
+            <a:pPr algn="l">
+              <a:lnSpc>
+                <a:spcPct val="140000"/>
+              </a:lnSpc>
+            </a:pPr>
+            <a:r>
+              <a:rPr sz="1900" b="0" i="0">
+                <a:solidFill>
+                  <a:srgbClr val="3A3D40"/>
+                </a:solidFill>
+                <a:latin typeface="Verdana"/>
+              </a:rPr>
+              <a:t>Quand vous vous reposez</a:t>
+            </a:r>
+          </a:p>
+        </p:txBody>
+      </p:sp>
+      <p:sp>
+        <p:nvSpPr>
+          <p:cNvPr id="16" name="Rounded Rectangle 15"/>
+          <p:cNvSpPr/>
+          <p:nvPr/>
+        </p:nvSpPr>
+        <p:spPr>
+          <a:xfrm>
+            <a:off x="566928" y="3693160"/>
+            <a:ext cx="11057839" cy="648716"/>
+          </a:xfrm>
+          <a:prstGeom prst="roundRect">
+            <a:avLst>
+              <a:gd name="adj" fmla="val 22552"/>
+            </a:avLst>
+          </a:prstGeom>
+          <a:solidFill>
+            <a:srgbClr val="FFFFFF"/>
+          </a:solidFill>
+          <a:ln w="12700">
+            <a:solidFill>
+              <a:srgbClr val="EAEAE8"/>
+            </a:solidFill>
+          </a:ln>
+          <a:effectLst/>
+        </p:spPr>
+        <p:style>
+          <a:lnRef idx="1">
+            <a:schemeClr val="accent1"/>
+          </a:lnRef>
+          <a:fillRef idx="3">
+            <a:schemeClr val="accent1"/>
+          </a:fillRef>
+          <a:effectRef idx="2">
+            <a:schemeClr val="accent1"/>
+          </a:effectRef>
+          <a:fontRef idx="minor">
+            <a:schemeClr val="lt1"/>
+          </a:fontRef>
+        </p:style>
+        <p:txBody>
+          <a:bodyPr rtlCol="0" anchor="ctr"/>
+          <a:lstStyle/>
+          <a:p/>
+        </p:txBody>
+      </p:sp>
+      <p:sp>
+        <p:nvSpPr>
+          <p:cNvPr id="17" name="Rounded Rectangle 16"/>
+          <p:cNvSpPr/>
+          <p:nvPr/>
+        </p:nvSpPr>
+        <p:spPr>
+          <a:xfrm>
+            <a:off x="841247" y="3834638"/>
+            <a:ext cx="365760" cy="365760"/>
+          </a:xfrm>
+          <a:prstGeom prst="roundRect">
+            <a:avLst>
+              <a:gd name="adj" fmla="val 32500"/>
+            </a:avLst>
+          </a:prstGeom>
+          <a:solidFill>
+            <a:srgbClr val="FBEEDC"/>
+          </a:solidFill>
+          <a:ln>
+            <a:noFill/>
+          </a:ln>
+          <a:effectLst/>
+        </p:spPr>
+        <p:style>
+          <a:lnRef idx="1">
+            <a:schemeClr val="accent1"/>
+          </a:lnRef>
+          <a:fillRef idx="3">
+            <a:schemeClr val="accent1"/>
+          </a:fillRef>
+          <a:effectRef idx="2">
+            <a:schemeClr val="accent1"/>
+          </a:effectRef>
+          <a:fontRef idx="minor">
+            <a:schemeClr val="lt1"/>
+          </a:fontRef>
+        </p:style>
+        <p:txBody>
+          <a:bodyPr rtlCol="0" anchor="ctr"/>
+          <a:lstStyle/>
+          <a:p/>
+        </p:txBody>
+      </p:sp>
+      <p:sp>
+        <p:nvSpPr>
+          <p:cNvPr id="18" name="TextBox 17"/>
+          <p:cNvSpPr txBox="1"/>
+          <p:nvPr/>
+        </p:nvSpPr>
+        <p:spPr>
+          <a:xfrm>
+            <a:off x="841247" y="3898646"/>
+            <a:ext cx="365760" cy="256032"/>
+          </a:xfrm>
+          <a:prstGeom prst="rect">
+            <a:avLst/>
+          </a:prstGeom>
+          <a:noFill/>
+        </p:spPr>
+        <p:txBody>
+          <a:bodyPr wrap="square" lIns="0" rIns="0" tIns="0" bIns="0" anchor="t">
+            <a:spAutoFit/>
+          </a:bodyPr>
+          <a:lstStyle/>
+          <a:p>
+            <a:pPr algn="ctr">
+              <a:lnSpc>
+                <a:spcPct val="135000"/>
+              </a:lnSpc>
+            </a:pPr>
+            <a:r>
+              <a:rPr sz="1500" b="1" i="0">
+                <a:solidFill>
+                  <a:srgbClr val="B45309"/>
+                </a:solidFill>
+                <a:latin typeface="Verdana"/>
+              </a:rPr>
+              <a:t>3</a:t>
+            </a:r>
+          </a:p>
+        </p:txBody>
+      </p:sp>
+      <p:sp>
+        <p:nvSpPr>
+          <p:cNvPr id="19" name="TextBox 18"/>
+          <p:cNvSpPr txBox="1"/>
+          <p:nvPr/>
+        </p:nvSpPr>
+        <p:spPr>
+          <a:xfrm>
+            <a:off x="1344168" y="3848608"/>
+            <a:ext cx="10097719" cy="374396"/>
+          </a:xfrm>
+          <a:prstGeom prst="rect">
+            <a:avLst/>
+          </a:prstGeom>
+          <a:noFill/>
+        </p:spPr>
+        <p:txBody>
+          <a:bodyPr wrap="square" lIns="0" rIns="0" tIns="0" bIns="0" anchor="t">
+            <a:spAutoFit/>
+          </a:bodyPr>
+          <a:lstStyle/>
+          <a:p>
+            <a:pPr algn="l">
+              <a:lnSpc>
+                <a:spcPct val="140000"/>
+              </a:lnSpc>
+            </a:pPr>
+            <a:r>
+              <a:rPr sz="1900" b="0" i="0">
+                <a:solidFill>
+                  <a:srgbClr val="3A3D40"/>
+                </a:solidFill>
+                <a:latin typeface="Verdana"/>
+              </a:rPr>
+              <a:t>À quelle heure vous vous réveillez</a:t>
+            </a:r>
+          </a:p>
+        </p:txBody>
+      </p:sp>
+    </p:spTree>
+  </p:cSld>
+  <p:clrMapOvr>
+    <a:masterClrMapping/>
+  </p:clrMapOvr>
+</p:sld>
+</file>
+
+<file path=ppt/slides/slide16.xml><?xml version="1.0" encoding="utf-8"?>
+<p:sld xmlns:a="http://schemas.openxmlformats.org/drawingml/2006/main" xmlns:p="http://schemas.openxmlformats.org/presentationml/2006/main" xmlns:r="http://schemas.openxmlformats.org/officeDocument/2006/relationships">
+  <p:cSld>
+    <p:spTree>
+      <p:nvGrpSpPr>
+        <p:cNvPr id="1" name=""/>
+        <p:cNvGrpSpPr/>
+        <p:nvPr/>
+      </p:nvGrpSpPr>
+      <p:grpSpPr/>
+      <p:sp>
+        <p:nvSpPr>
+          <p:cNvPr id="2" name="Rectangle 1"/>
+          <p:cNvSpPr/>
+          <p:nvPr/>
+        </p:nvSpPr>
+        <p:spPr>
+          <a:xfrm>
+            <a:off x="0" y="0"/>
+            <a:ext cx="12191695" cy="6858000"/>
+          </a:xfrm>
+          <a:prstGeom prst="rect">
+            <a:avLst/>
+          </a:prstGeom>
+          <a:solidFill>
+            <a:srgbClr val="F7F7F5"/>
+          </a:solidFill>
+          <a:ln>
+            <a:noFill/>
+          </a:ln>
+          <a:effectLst/>
+        </p:spPr>
+        <p:style>
+          <a:lnRef idx="1">
+            <a:schemeClr val="accent1"/>
+          </a:lnRef>
+          <a:fillRef idx="3">
+            <a:schemeClr val="accent1"/>
+          </a:fillRef>
+          <a:effectRef idx="2">
+            <a:schemeClr val="accent1"/>
+          </a:effectRef>
+          <a:fontRef idx="minor">
+            <a:schemeClr val="lt1"/>
+          </a:fontRef>
+        </p:style>
+        <p:txBody>
+          <a:bodyPr rtlCol="0" anchor="ctr"/>
+          <a:lstStyle/>
+          <a:p/>
+        </p:txBody>
+      </p:sp>
+      <p:sp>
+        <p:nvSpPr>
+          <p:cNvPr id="3" name="TextBox 2"/>
+          <p:cNvSpPr txBox="1"/>
+          <p:nvPr/>
+        </p:nvSpPr>
+        <p:spPr>
+          <a:xfrm>
+            <a:off x="566928" y="6355080"/>
+            <a:ext cx="6400800" cy="219456"/>
+          </a:xfrm>
+          <a:prstGeom prst="rect">
+            <a:avLst/>
+          </a:prstGeom>
+          <a:noFill/>
+        </p:spPr>
+        <p:txBody>
+          <a:bodyPr wrap="square" lIns="0" rIns="0" tIns="0" bIns="0" anchor="t">
+            <a:spAutoFit/>
+          </a:bodyPr>
+          <a:lstStyle/>
+          <a:p>
+            <a:pPr algn="l">
+              <a:lnSpc>
+                <a:spcPct val="135000"/>
+              </a:lnSpc>
+            </a:pPr>
+            <a:r>
+              <a:rPr sz="1200" b="0" i="0">
+                <a:solidFill>
+                  <a:srgbClr val="6E7175"/>
+                </a:solidFill>
+                <a:latin typeface="Verdana"/>
+              </a:rPr>
+              <a:t>C2 · Prendre rendez-vous et aller à la pharmacie</a:t>
+            </a:r>
+          </a:p>
+        </p:txBody>
+      </p:sp>
+      <p:sp>
+        <p:nvSpPr>
+          <p:cNvPr id="4" name="TextBox 3"/>
+          <p:cNvSpPr txBox="1"/>
+          <p:nvPr/>
+        </p:nvSpPr>
+        <p:spPr>
+          <a:xfrm>
+            <a:off x="10710367" y="6355080"/>
+            <a:ext cx="914400" cy="219456"/>
+          </a:xfrm>
+          <a:prstGeom prst="rect">
+            <a:avLst/>
+          </a:prstGeom>
+          <a:noFill/>
+        </p:spPr>
+        <p:txBody>
+          <a:bodyPr wrap="square" lIns="0" rIns="0" tIns="0" bIns="0" anchor="t">
+            <a:spAutoFit/>
+          </a:bodyPr>
+          <a:lstStyle/>
+          <a:p>
+            <a:pPr algn="r">
+              <a:lnSpc>
+                <a:spcPct val="135000"/>
+              </a:lnSpc>
+            </a:pPr>
+            <a:r>
+              <a:rPr sz="1200" b="0" i="0">
+                <a:solidFill>
+                  <a:srgbClr val="6E7175"/>
+                </a:solidFill>
+                <a:latin typeface="Verdana"/>
+              </a:rPr>
+              <a:t>16</a:t>
+            </a:r>
+          </a:p>
+        </p:txBody>
+      </p:sp>
+      <p:sp>
+        <p:nvSpPr>
           <p:cNvPr id="5" name="Rectangle 4"/>
           <p:cNvSpPr/>
           <p:nvPr/>
@@ -15120,7 +15740,7 @@
                 </a:solidFill>
                 <a:latin typeface="Verdana"/>
               </a:rPr>
-              <a:t>LE PIÈGE DU PRONOM OUBLIÉ</a:t>
+              <a:t>DANS L'ACTIVITÉ INTERACTIVE</a:t>
             </a:r>
           </a:p>
         </p:txBody>
@@ -15159,33 +15779,72 @@
                 </a:solidFill>
                 <a:latin typeface="Verdana"/>
               </a:rPr>
-              <a:t>Le piège le plus fréquent</a:t>
-            </a:r>
-          </a:p>
-        </p:txBody>
-      </p:sp>
-      <p:sp>
-        <p:nvSpPr>
-          <p:cNvPr id="7" name="Rounded Rectangle 6"/>
+              <a:t>Les verbes pronominaux</a:t>
+            </a:r>
+          </a:p>
+        </p:txBody>
+      </p:sp>
+      <p:sp>
+        <p:nvSpPr>
+          <p:cNvPr id="7" name="TextBox 6"/>
+          <p:cNvSpPr txBox="1"/>
+          <p:nvPr/>
+        </p:nvSpPr>
+        <p:spPr>
+          <a:xfrm>
+            <a:off x="566928" y="1645920"/>
+            <a:ext cx="11057839" cy="329184"/>
+          </a:xfrm>
+          <a:prstGeom prst="rect">
+            <a:avLst/>
+          </a:prstGeom>
+          <a:noFill/>
+        </p:spPr>
+        <p:txBody>
+          <a:bodyPr wrap="square" lIns="0" rIns="0" tIns="0" bIns="0" anchor="t">
+            <a:spAutoFit/>
+          </a:bodyPr>
+          <a:lstStyle/>
+          <a:p>
+            <a:pPr algn="l">
+              <a:lnSpc>
+                <a:spcPct val="135000"/>
+              </a:lnSpc>
+            </a:pPr>
+            <a:r>
+              <a:rPr sz="1800" b="0" i="0">
+                <a:solidFill>
+                  <a:srgbClr val="6E7175"/>
+                </a:solidFill>
+                <a:latin typeface="Verdana"/>
+              </a:rPr>
+              <a:t>L'écran que les élèves vont ouvrir. Les réponses sont encore dans le banc, à droite.</a:t>
+            </a:r>
+          </a:p>
+        </p:txBody>
+      </p:sp>
+      <p:sp>
+        <p:nvSpPr>
+          <p:cNvPr id="8" name="Rounded Rectangle 7"/>
           <p:cNvSpPr/>
           <p:nvPr/>
         </p:nvSpPr>
         <p:spPr>
           <a:xfrm>
-            <a:off x="566928" y="1856232"/>
-            <a:ext cx="5428335" cy="2331720"/>
+            <a:off x="3335551" y="2084831"/>
+            <a:ext cx="5520593" cy="4087368"/>
           </a:xfrm>
           <a:prstGeom prst="roundRect">
             <a:avLst>
-              <a:gd name="adj" fmla="val 6274"/>
+              <a:gd name="adj" fmla="val 2237"/>
             </a:avLst>
           </a:prstGeom>
           <a:solidFill>
-            <a:srgbClr val="FFF6F5"/>
+            <a:srgbClr val="FFFFFF"/>
           </a:solidFill>
           <a:ln w="12700">
             <a:solidFill>
-              <a:srgbClr val="DC2626"/>
+              <a:srgbClr val="D6D6D2"/>
             </a:solidFill>
           </a:ln>
           <a:effectLst/>
@@ -15210,293 +15869,30 @@
           <a:p/>
         </p:txBody>
       </p:sp>
-      <p:sp>
-        <p:nvSpPr>
-          <p:cNvPr id="8" name="TextBox 7"/>
-          <p:cNvSpPr txBox="1"/>
-          <p:nvPr/>
-        </p:nvSpPr>
-        <p:spPr>
-          <a:xfrm>
-            <a:off x="932688" y="2130552"/>
-            <a:ext cx="4696815" cy="274320"/>
-          </a:xfrm>
-          <a:prstGeom prst="rect">
-            <a:avLst/>
-          </a:prstGeom>
-          <a:noFill/>
-        </p:spPr>
-        <p:txBody>
-          <a:bodyPr wrap="square" lIns="0" rIns="0" tIns="0" bIns="0" anchor="t">
-            <a:spAutoFit/>
-          </a:bodyPr>
-          <a:lstStyle/>
-          <a:p>
-            <a:pPr algn="l">
-              <a:lnSpc>
-                <a:spcPct val="135000"/>
-              </a:lnSpc>
-            </a:pPr>
-            <a:r>
-              <a:rPr sz="1300" b="1" i="0" spc="156">
-                <a:solidFill>
-                  <a:srgbClr val="B91C1C"/>
-                </a:solidFill>
-                <a:latin typeface="Verdana"/>
-              </a:rPr>
-              <a:t>ON ENTEND SOUVENT</a:t>
-            </a:r>
-          </a:p>
-        </p:txBody>
-      </p:sp>
-      <p:sp>
-        <p:nvSpPr>
-          <p:cNvPr id="9" name="TextBox 8"/>
-          <p:cNvSpPr txBox="1"/>
-          <p:nvPr/>
-        </p:nvSpPr>
-        <p:spPr>
-          <a:xfrm>
-            <a:off x="932688" y="2569464"/>
-            <a:ext cx="4696815" cy="1417320"/>
-          </a:xfrm>
-          <a:prstGeom prst="rect">
-            <a:avLst/>
-          </a:prstGeom>
-          <a:noFill/>
-        </p:spPr>
-        <p:txBody>
-          <a:bodyPr wrap="square" lIns="0" rIns="0" tIns="0" bIns="0" anchor="t">
-            <a:spAutoFit/>
-          </a:bodyPr>
-          <a:lstStyle/>
-          <a:p>
-            <a:pPr algn="l">
-              <a:lnSpc>
-                <a:spcPct val="130000"/>
-              </a:lnSpc>
-            </a:pPr>
-            <a:r>
-              <a:rPr sz="2500" b="1" i="0">
-                <a:solidFill>
-                  <a:srgbClr val="17181A"/>
-                </a:solidFill>
-                <a:latin typeface="Verdana"/>
-              </a:rPr>
-              <a:t>Je sens fatiguée.</a:t>
-            </a:r>
-          </a:p>
-        </p:txBody>
-      </p:sp>
-      <p:sp>
-        <p:nvSpPr>
-          <p:cNvPr id="10" name="Rounded Rectangle 9"/>
-          <p:cNvSpPr/>
-          <p:nvPr/>
-        </p:nvSpPr>
-        <p:spPr>
-          <a:xfrm>
-            <a:off x="6196431" y="1856232"/>
-            <a:ext cx="5428335" cy="2331720"/>
-          </a:xfrm>
-          <a:prstGeom prst="roundRect">
-            <a:avLst>
-              <a:gd name="adj" fmla="val 6274"/>
-            </a:avLst>
-          </a:prstGeom>
-          <a:solidFill>
-            <a:srgbClr val="E6F5EE"/>
-          </a:solidFill>
-          <a:ln w="12700">
-            <a:solidFill>
-              <a:srgbClr val="0A8F5B"/>
-            </a:solidFill>
-          </a:ln>
-          <a:effectLst/>
-        </p:spPr>
-        <p:style>
-          <a:lnRef idx="1">
-            <a:schemeClr val="accent1"/>
-          </a:lnRef>
-          <a:fillRef idx="3">
-            <a:schemeClr val="accent1"/>
-          </a:fillRef>
-          <a:effectRef idx="2">
-            <a:schemeClr val="accent1"/>
-          </a:effectRef>
-          <a:fontRef idx="minor">
-            <a:schemeClr val="lt1"/>
-          </a:fontRef>
-        </p:style>
-        <p:txBody>
-          <a:bodyPr rtlCol="0" anchor="ctr"/>
-          <a:lstStyle/>
-          <a:p/>
-        </p:txBody>
-      </p:sp>
-      <p:sp>
-        <p:nvSpPr>
-          <p:cNvPr id="11" name="TextBox 10"/>
-          <p:cNvSpPr txBox="1"/>
-          <p:nvPr/>
-        </p:nvSpPr>
-        <p:spPr>
-          <a:xfrm>
-            <a:off x="6562191" y="2130552"/>
-            <a:ext cx="4696815" cy="274320"/>
-          </a:xfrm>
-          <a:prstGeom prst="rect">
-            <a:avLst/>
-          </a:prstGeom>
-          <a:noFill/>
-        </p:spPr>
-        <p:txBody>
-          <a:bodyPr wrap="square" lIns="0" rIns="0" tIns="0" bIns="0" anchor="t">
-            <a:spAutoFit/>
-          </a:bodyPr>
-          <a:lstStyle/>
-          <a:p>
-            <a:pPr algn="l">
-              <a:lnSpc>
-                <a:spcPct val="135000"/>
-              </a:lnSpc>
-            </a:pPr>
-            <a:r>
-              <a:rPr sz="1300" b="1" i="0" spc="156">
-                <a:solidFill>
-                  <a:srgbClr val="07734A"/>
-                </a:solidFill>
-                <a:latin typeface="Verdana"/>
-              </a:rPr>
-              <a:t>IL FAUT DIRE PLUTÔT</a:t>
-            </a:r>
-          </a:p>
-        </p:txBody>
-      </p:sp>
-      <p:sp>
-        <p:nvSpPr>
-          <p:cNvPr id="12" name="TextBox 11"/>
-          <p:cNvSpPr txBox="1"/>
-          <p:nvPr/>
-        </p:nvSpPr>
-        <p:spPr>
-          <a:xfrm>
-            <a:off x="6562191" y="2569464"/>
-            <a:ext cx="4696815" cy="1417320"/>
-          </a:xfrm>
-          <a:prstGeom prst="rect">
-            <a:avLst/>
-          </a:prstGeom>
-          <a:noFill/>
-        </p:spPr>
-        <p:txBody>
-          <a:bodyPr wrap="square" lIns="0" rIns="0" tIns="0" bIns="0" anchor="t">
-            <a:spAutoFit/>
-          </a:bodyPr>
-          <a:lstStyle/>
-          <a:p>
-            <a:pPr algn="l">
-              <a:lnSpc>
-                <a:spcPct val="130000"/>
-              </a:lnSpc>
-            </a:pPr>
-            <a:r>
-              <a:rPr sz="2500" b="1" i="0">
-                <a:solidFill>
-                  <a:srgbClr val="17181A"/>
-                </a:solidFill>
-                <a:latin typeface="Verdana"/>
-              </a:rPr>
-              <a:t>Je me sens fatiguée.</a:t>
-            </a:r>
-          </a:p>
-        </p:txBody>
-      </p:sp>
-      <p:sp>
-        <p:nvSpPr>
-          <p:cNvPr id="13" name="Rounded Rectangle 12"/>
-          <p:cNvSpPr/>
-          <p:nvPr/>
-        </p:nvSpPr>
-        <p:spPr>
-          <a:xfrm>
-            <a:off x="566928" y="4462272"/>
-            <a:ext cx="11057839" cy="1618487"/>
-          </a:xfrm>
-          <a:prstGeom prst="roundRect">
-            <a:avLst>
-              <a:gd name="adj" fmla="val 9039"/>
-            </a:avLst>
-          </a:prstGeom>
-          <a:solidFill>
-            <a:srgbClr val="FFFFFF"/>
-          </a:solidFill>
-          <a:ln w="12700">
-            <a:solidFill>
-              <a:srgbClr val="EAEAE8"/>
-            </a:solidFill>
-          </a:ln>
-          <a:effectLst/>
-        </p:spPr>
-        <p:style>
-          <a:lnRef idx="1">
-            <a:schemeClr val="accent1"/>
-          </a:lnRef>
-          <a:fillRef idx="3">
-            <a:schemeClr val="accent1"/>
-          </a:fillRef>
-          <a:effectRef idx="2">
-            <a:schemeClr val="accent1"/>
-          </a:effectRef>
-          <a:fontRef idx="minor">
-            <a:schemeClr val="lt1"/>
-          </a:fontRef>
-        </p:style>
-        <p:txBody>
-          <a:bodyPr rtlCol="0" anchor="ctr"/>
-          <a:lstStyle/>
-          <a:p/>
-        </p:txBody>
-      </p:sp>
-      <p:sp>
-        <p:nvSpPr>
-          <p:cNvPr id="14" name="TextBox 13"/>
-          <p:cNvSpPr txBox="1"/>
-          <p:nvPr/>
-        </p:nvSpPr>
-        <p:spPr>
-          <a:xfrm>
-            <a:off x="969264" y="4736592"/>
-            <a:ext cx="10234879" cy="1150620"/>
-          </a:xfrm>
-          <a:prstGeom prst="rect">
-            <a:avLst/>
-          </a:prstGeom>
-          <a:noFill/>
-        </p:spPr>
-        <p:txBody>
-          <a:bodyPr wrap="square" lIns="0" rIns="0" tIns="0" bIns="0" anchor="t">
-            <a:spAutoFit/>
-          </a:bodyPr>
-          <a:lstStyle/>
-          <a:p>
-            <a:pPr algn="l">
-              <a:lnSpc>
-                <a:spcPct val="145000"/>
-              </a:lnSpc>
-            </a:pPr>
-            <a:r>
-              <a:rPr sz="2000" b="0" i="0">
-                <a:solidFill>
-                  <a:srgbClr val="4B4F52"/>
-                </a:solidFill>
-                <a:latin typeface="Verdana"/>
-              </a:rPr>
-              <a:t>Sans pronom, « sentir » veut dire percevoir une odeur : « je sens le café ». Avec le pronom, il parle de votre état. Le petit mot porte tout le sens de la phrase.</a:t>
-            </a:r>
-          </a:p>
-        </p:txBody>
-      </p:sp>
+      <p:pic>
+        <p:nvPicPr>
+          <p:cNvPr id="9" name="Picture 8" descr="l2.png"/>
+          <p:cNvPicPr>
+            <a:picLocks noChangeAspect="1"/>
+          </p:cNvPicPr>
+          <p:nvPr/>
+        </p:nvPicPr>
+        <p:blipFill>
+          <a:blip r:embed="rId2"/>
+          <a:stretch>
+            <a:fillRect/>
+          </a:stretch>
+        </p:blipFill>
+        <p:spPr>
+          <a:xfrm>
+            <a:off x="3353839" y="2103120"/>
+            <a:ext cx="5484017" cy="4050792"/>
+          </a:xfrm>
+          <a:prstGeom prst="rect">
+            <a:avLst/>
+          </a:prstGeom>
+        </p:spPr>
+      </p:pic>
     </p:spTree>
   </p:cSld>
   <p:clrMapOvr>
@@ -15669,7 +16065,7 @@
                 </a:solidFill>
                 <a:latin typeface="Verdana"/>
               </a:rPr>
-              <a:t>LE PIÈGE DU PRONOM QUI NE SUIT PAS</a:t>
+              <a:t>LE PIÈGE DU PRONOM OUBLIÉ</a:t>
             </a:r>
           </a:p>
         </p:txBody>
@@ -15832,7 +16228,7 @@
                 </a:solidFill>
                 <a:latin typeface="Verdana"/>
               </a:rPr>
-              <a:t>Nous se reposons le week-end.</a:t>
+              <a:t>Je sens fatiguée.</a:t>
             </a:r>
           </a:p>
         </p:txBody>
@@ -15956,7 +16352,7 @@
                 </a:solidFill>
                 <a:latin typeface="Verdana"/>
               </a:rPr>
-              <a:t>Nous nous reposons le week-end.</a:t>
+              <a:t>Je me sens fatiguée.</a:t>
             </a:r>
           </a:p>
         </p:txBody>
@@ -15970,11 +16366,11 @@
         <p:spPr>
           <a:xfrm>
             <a:off x="566928" y="4462272"/>
-            <a:ext cx="11057839" cy="1285240"/>
+            <a:ext cx="11057839" cy="1618487"/>
           </a:xfrm>
           <a:prstGeom prst="roundRect">
             <a:avLst>
-              <a:gd name="adj" fmla="val 11383"/>
+              <a:gd name="adj" fmla="val 9039"/>
             </a:avLst>
           </a:prstGeom>
           <a:solidFill>
@@ -16016,7 +16412,7 @@
         <p:spPr>
           <a:xfrm>
             <a:off x="969264" y="4736592"/>
-            <a:ext cx="10234879" cy="782320"/>
+            <a:ext cx="10234879" cy="1150620"/>
           </a:xfrm>
           <a:prstGeom prst="rect">
             <a:avLst/>
@@ -16041,7 +16437,7 @@
                 </a:solidFill>
                 <a:latin typeface="Verdana"/>
               </a:rPr>
-              <a:t>Le pronom prend toujours la personne du sujet. « Se » n'appartient qu'à la troisième personne — il / elle / ils / elles.</a:t>
+              <a:t>Sans pronom, « sentir » veut dire percevoir une odeur : « je sens le café ». Avec le pronom, il parle de votre état. Le petit mot porte tout le sens de la phrase.</a:t>
             </a:r>
           </a:p>
         </p:txBody>
